--- a/reports/Presentacion_EDA_Titanic.pptx
+++ b/reports/Presentacion_EDA_Titanic.pptx
@@ -3844,24 +3844,7 @@
       <p:grpSpPr/>
       <p:sp>
         <p:nvSpPr>
-          <p:cNvPr id="2" name="Title 1"/>
-          <p:cNvSpPr>
-            <a:spLocks noGrp="1"/>
-          </p:cNvSpPr>
-          <p:nvPr>
-            <p:ph type="title"/>
-          </p:nvPr>
-        </p:nvSpPr>
-        <p:spPr/>
-        <p:txBody>
-          <a:bodyPr/>
-          <a:lstStyle/>
-          <a:p/>
-        </p:txBody>
-      </p:sp>
-      <p:sp>
-        <p:nvSpPr>
-          <p:cNvPr id="3" name="TextBox 2"/>
+          <p:cNvPr id="2" name="TextBox 1"/>
           <p:cNvSpPr txBox="1"/>
           <p:nvPr/>
         </p:nvSpPr>
@@ -3895,7 +3878,7 @@
       </p:sp>
       <p:sp>
         <p:nvSpPr>
-          <p:cNvPr id="4" name="Rectangle 3"/>
+          <p:cNvPr id="3" name="Rectangle 2"/>
           <p:cNvSpPr/>
           <p:nvPr/>
         </p:nvSpPr>
@@ -3938,14 +3921,14 @@
       </p:sp>
       <p:sp>
         <p:nvSpPr>
-          <p:cNvPr id="5" name="TextBox 4"/>
+          <p:cNvPr id="4" name="TextBox 3"/>
           <p:cNvSpPr txBox="1"/>
           <p:nvPr/>
         </p:nvSpPr>
         <p:spPr>
           <a:xfrm>
             <a:off x="274320" y="960120"/>
-            <a:ext cx="6217920" cy="5669280"/>
+            <a:ext cx="6035040" cy="5669280"/>
           </a:xfrm>
           <a:prstGeom prst="rect">
             <a:avLst/>
@@ -3965,29 +3948,18 @@
                 </a:solidFill>
                 <a:latin typeface="Consolas"/>
               </a:rPr>
-              <a:t>Histograma EDAD:</a:t>
-            </a:r>
-          </a:p>
-          <a:p>
-            <a:r>
-              <a:rPr sz="1400" b="0">
-                <a:solidFill>
-                  <a:srgbClr val="00FF41"/>
-                </a:solidFill>
-                <a:latin typeface="Consolas"/>
-              </a:rPr>
-              <a:t>  Distribucion aproximadamente normal (sesgo leve). Pico central: 20-35 anos.</a:t>
-            </a:r>
-          </a:p>
-          <a:p>
-            <a:r>
-              <a:rPr sz="1400" b="0">
-                <a:solidFill>
-                  <a:srgbClr val="00FF41"/>
-                </a:solidFill>
-                <a:latin typeface="Consolas"/>
-              </a:rPr>
-              <a:t>  Indica una mayoria de pasajeros en edad productiva.</a:t>
+              <a:t>Countplot (variable Y - SOBREVIVIO):</a:t>
+            </a:r>
+          </a:p>
+          <a:p>
+            <a:r>
+              <a:rPr sz="1400" b="0">
+                <a:solidFill>
+                  <a:srgbClr val="00FF41"/>
+                </a:solidFill>
+                <a:latin typeface="Consolas"/>
+              </a:rPr>
+              <a:t>  Desequilibrio moderado 61.6% / 38.4% — aceptable para modelado sin sobremuestreo.</a:t>
             </a:r>
           </a:p>
           <a:p/>
@@ -3999,29 +3971,29 @@
                 </a:solidFill>
                 <a:latin typeface="Consolas"/>
               </a:rPr>
-              <a:t>Diagrama de Dispersion (EDAD vs TARIFA):</a:t>
-            </a:r>
-          </a:p>
-          <a:p>
-            <a:r>
-              <a:rPr sz="1400" b="0">
-                <a:solidFill>
-                  <a:srgbClr val="00FF41"/>
-                </a:solidFill>
-                <a:latin typeface="Consolas"/>
-              </a:rPr>
-              <a:t>  Los sobrevivientes (verde) se concentran en tarifas altas, independiente de la edad.</a:t>
-            </a:r>
-          </a:p>
-          <a:p>
-            <a:r>
-              <a:rPr sz="1400" b="0">
-                <a:solidFill>
-                  <a:srgbClr val="00FF41"/>
-                </a:solidFill>
-                <a:latin typeface="Consolas"/>
-              </a:rPr>
-              <a:t>  Confirma que la TARIFA es mejor predictor que la EDAD.</a:t>
+              <a:t>Scatter plot 2D (EDAD vs TARIFA):</a:t>
+            </a:r>
+          </a:p>
+          <a:p>
+            <a:r>
+              <a:rPr sz="1400" b="0">
+                <a:solidFill>
+                  <a:srgbClr val="00FF41"/>
+                </a:solidFill>
+                <a:latin typeface="Consolas"/>
+              </a:rPr>
+              <a:t>  Los supervivientes (verde) se concentran en tarifas altas, sin importar la edad.</a:t>
+            </a:r>
+          </a:p>
+          <a:p>
+            <a:r>
+              <a:rPr sz="1400" b="0">
+                <a:solidFill>
+                  <a:srgbClr val="00FF41"/>
+                </a:solidFill>
+                <a:latin typeface="Consolas"/>
+              </a:rPr>
+              <a:t>  Confirma que TARIFA es mejor predictor que EDAD individualmente.</a:t>
             </a:r>
           </a:p>
           <a:p/>
@@ -4033,29 +4005,29 @@
                 </a:solidFill>
                 <a:latin typeface="Consolas"/>
               </a:rPr>
-              <a:t>Boxplot (TARIFA por SOBREVIVIO):</a:t>
-            </a:r>
-          </a:p>
-          <a:p>
-            <a:r>
-              <a:rPr sz="1400" b="0">
-                <a:solidFill>
-                  <a:srgbClr val="00FF41"/>
-                </a:solidFill>
-                <a:latin typeface="Consolas"/>
-              </a:rPr>
-              <a:t>  La mediana de tarifa de supervivientes (~26 GBP) es MAYOR que la de no supervivientes</a:t>
-            </a:r>
-          </a:p>
-          <a:p>
-            <a:r>
-              <a:rPr sz="1400" b="0">
-                <a:solidFill>
-                  <a:srgbClr val="00FF41"/>
-                </a:solidFill>
-                <a:latin typeface="Consolas"/>
-              </a:rPr>
-              <a:t>  (~10 GBP) — diferencia altamente significativa.</a:t>
+              <a:t>Histograma (EDAD):</a:t>
+            </a:r>
+          </a:p>
+          <a:p>
+            <a:r>
+              <a:rPr sz="1400" b="0">
+                <a:solidFill>
+                  <a:srgbClr val="00FF41"/>
+                </a:solidFill>
+                <a:latin typeface="Consolas"/>
+              </a:rPr>
+              <a:t>  Distribucion aproximadamente normal, pico en 20-35 anos.</a:t>
+            </a:r>
+          </a:p>
+          <a:p>
+            <a:r>
+              <a:rPr sz="1400" b="0">
+                <a:solidFill>
+                  <a:srgbClr val="00FF41"/>
+                </a:solidFill>
+                <a:latin typeface="Consolas"/>
+              </a:rPr>
+              <a:t>  La mayoria de pasajeros era poblacion adulta joven.</a:t>
             </a:r>
           </a:p>
           <a:p/>
@@ -4067,40 +4039,51 @@
                 </a:solidFill>
                 <a:latin typeface="Consolas"/>
               </a:rPr>
-              <a:t>Distribucion de Y (SOBREVIVIO):</a:t>
-            </a:r>
-          </a:p>
-          <a:p>
-            <a:r>
-              <a:rPr sz="1400" b="0">
-                <a:solidFill>
-                  <a:srgbClr val="00FF41"/>
-                </a:solidFill>
-                <a:latin typeface="Consolas"/>
-              </a:rPr>
-              <a:t>  Desequilibrio moderado 61.6% / 38.4% — no requiere tecnicas de sobremuestreo obligatorio.</a:t>
+              <a:t>Boxplots (TARIFA y EDAD segun SOBREVIVIO):</a:t>
+            </a:r>
+          </a:p>
+          <a:p>
+            <a:r>
+              <a:rPr sz="1400" b="0">
+                <a:solidFill>
+                  <a:srgbClr val="00FF41"/>
+                </a:solidFill>
+                <a:latin typeface="Consolas"/>
+              </a:rPr>
+              <a:t>  La mediana de TARIFA de supervivientes (~26 GBP) es 2.5x mayor que la de no</a:t>
+            </a:r>
+          </a:p>
+          <a:p>
+            <a:r>
+              <a:rPr sz="1400" b="0">
+                <a:solidFill>
+                  <a:srgbClr val="00FF41"/>
+                </a:solidFill>
+                <a:latin typeface="Consolas"/>
+              </a:rPr>
+              <a:t>  supervivientes (~10 GBP) — diferencia altamente significativa y visualmente clara.</a:t>
             </a:r>
           </a:p>
         </p:txBody>
       </p:sp>
       <p:pic>
         <p:nvPicPr>
-          <p:cNvPr id="6" name="Picture 5" descr="E_visualizacion.png"/>
+          <p:cNvPr id="5" name="Picture 4" descr="viz_slide.png"/>
           <p:cNvPicPr>
             <a:picLocks noChangeAspect="1"/>
           </p:cNvPicPr>
           <p:nvPr/>
         </p:nvPicPr>
         <p:blipFill>
-          <a:blip r:embed="rId2"/>
+          <a:blip r:embed="rId3"/>
           <a:stretch>
             <a:fillRect/>
           </a:stretch>
         </p:blipFill>
         <p:spPr>
           <a:xfrm>
-            <a:off x="6583680" y="960120"/>
-            <a:ext cx="5394960" cy="1683469"/>
+            <a:off x="6492240" y="960120"/>
+            <a:ext cx="5394960" cy="1957902"/>
           </a:xfrm>
           <a:prstGeom prst="rect">
             <a:avLst/>

--- a/reports/Presentacion_EDA_Titanic.pptx
+++ b/reports/Presentacion_EDA_Titanic.pptx
@@ -3119,7 +3119,7 @@
           <a:lstStyle/>
           <a:p>
             <a:r>
-              <a:rPr b="1" sz="2800">
+              <a:rPr b="1" sz="2600">
                 <a:solidFill>
                   <a:srgbClr val="00FF41"/>
                 </a:solidFill>
@@ -3130,13 +3130,13 @@
           </a:p>
           <a:p>
             <a:r>
-              <a:rPr b="1" sz="2800">
-                <a:solidFill>
-                  <a:srgbClr val="00FF41"/>
-                </a:solidFill>
-                <a:latin typeface="Consolas"/>
-              </a:rPr>
-              <a:t>[ TITANIC DATASET ]</a:t>
+              <a:rPr b="1" sz="2600">
+                <a:solidFill>
+                  <a:srgbClr val="00FF41"/>
+                </a:solidFill>
+                <a:latin typeface="Consolas"/>
+              </a:rPr>
+              <a:t>   TITANIC DATASET — 891 PASAJEROS</a:t>
             </a:r>
           </a:p>
         </p:txBody>
@@ -3157,7 +3157,7 @@
           <a:lstStyle/>
           <a:p>
             <a:r>
-              <a:rPr sz="1700">
+              <a:rPr sz="1600">
                 <a:solidFill>
                   <a:srgbClr val="00FF41"/>
                 </a:solidFill>
@@ -3169,57 +3169,79 @@
           <a:p/>
           <a:p>
             <a:r>
-              <a:rPr sz="1700">
-                <a:solidFill>
-                  <a:srgbClr val="00FF41"/>
-                </a:solidFill>
-                <a:latin typeface="Consolas"/>
-              </a:rPr>
-              <a:t>[+] Estudiante: Alex Guaman</a:t>
-            </a:r>
-          </a:p>
-          <a:p>
-            <a:r>
-              <a:rPr sz="1700">
-                <a:solidFill>
-                  <a:srgbClr val="00FF41"/>
-                </a:solidFill>
-                <a:latin typeface="Consolas"/>
-              </a:rPr>
-              <a:t>[+] Asignatura: Inteligencia Artificial - Machine Learning</a:t>
-            </a:r>
-          </a:p>
-          <a:p>
-            <a:r>
-              <a:rPr sz="1700">
-                <a:solidFill>
-                  <a:srgbClr val="00FF41"/>
-                </a:solidFill>
-                <a:latin typeface="Consolas"/>
-              </a:rPr>
-              <a:t>[+] Docente: Ing. Remigio Hurtado, PhD.</a:t>
-            </a:r>
-          </a:p>
-          <a:p>
-            <a:r>
-              <a:rPr sz="1700">
-                <a:solidFill>
-                  <a:srgbClr val="00FF41"/>
-                </a:solidFill>
-                <a:latin typeface="Consolas"/>
-              </a:rPr>
-              <a:t>[+] Dataset: Titanic - Kaggle / Seaborn (891 obs. x 15 vars.)</a:t>
-            </a:r>
-          </a:p>
-          <a:p>
-            <a:r>
-              <a:rPr sz="1700">
-                <a:solidFill>
-                  <a:srgbClr val="00FF41"/>
-                </a:solidFill>
-                <a:latin typeface="Consolas"/>
-              </a:rPr>
-              <a:t>[+] Variable Y: survived  (0 = No Sobrevivio | 1 = Sobrevivio)</a:t>
+              <a:rPr sz="1600">
+                <a:solidFill>
+                  <a:srgbClr val="00FF41"/>
+                </a:solidFill>
+                <a:latin typeface="Consolas"/>
+              </a:rPr>
+              <a:t>[+] Estudiante:   Alex Guaman</a:t>
+            </a:r>
+          </a:p>
+          <a:p>
+            <a:r>
+              <a:rPr sz="1600">
+                <a:solidFill>
+                  <a:srgbClr val="00FF41"/>
+                </a:solidFill>
+                <a:latin typeface="Consolas"/>
+              </a:rPr>
+              <a:t>[+] Asignatura:   Inteligencia Artificial / Machine Learning</a:t>
+            </a:r>
+          </a:p>
+          <a:p>
+            <a:r>
+              <a:rPr sz="1600">
+                <a:solidFill>
+                  <a:srgbClr val="00FF41"/>
+                </a:solidFill>
+                <a:latin typeface="Consolas"/>
+              </a:rPr>
+              <a:t>[+] Docente:      Ing. Remigio Hurtado, PhD.</a:t>
+            </a:r>
+          </a:p>
+          <a:p>
+            <a:r>
+              <a:rPr sz="1600">
+                <a:solidFill>
+                  <a:srgbClr val="00FF41"/>
+                </a:solidFill>
+                <a:latin typeface="Consolas"/>
+              </a:rPr>
+              <a:t>[+] Dataset:      Titanic — Kaggle / Seaborn</a:t>
+            </a:r>
+          </a:p>
+          <a:p>
+            <a:r>
+              <a:rPr sz="1600">
+                <a:solidFill>
+                  <a:srgbClr val="00FF41"/>
+                </a:solidFill>
+                <a:latin typeface="Consolas"/>
+              </a:rPr>
+              <a:t>[+] Instancias:   891 pasajeros  |  15 variables</a:t>
+            </a:r>
+          </a:p>
+          <a:p>
+            <a:r>
+              <a:rPr sz="1600">
+                <a:solidFill>
+                  <a:srgbClr val="00FF41"/>
+                </a:solidFill>
+                <a:latin typeface="Consolas"/>
+              </a:rPr>
+              <a:t>[+] Variable Y:   survived  (0=No sobrevivio | 1=Sobrevivio)</a:t>
+            </a:r>
+          </a:p>
+          <a:p>
+            <a:r>
+              <a:rPr sz="1600">
+                <a:solidFill>
+                  <a:srgbClr val="00FF41"/>
+                </a:solidFill>
+                <a:latin typeface="Consolas"/>
+              </a:rPr>
+              <a:t>[+] Herramienta:  Python 3 — pandas, seaborn, matplotlib</a:t>
             </a:r>
           </a:p>
         </p:txBody>
@@ -3275,8 +3297,8 @@
         </p:nvSpPr>
         <p:spPr>
           <a:xfrm>
-            <a:off x="274320" y="137160"/>
-            <a:ext cx="11612880" cy="685800"/>
+            <a:off x="182880" y="91440"/>
+            <a:ext cx="11823192" cy="731520"/>
           </a:xfrm>
           <a:prstGeom prst="rect">
             <a:avLst/>
@@ -3290,7 +3312,7 @@
           <a:lstStyle/>
           <a:p>
             <a:r>
-              <a:rPr sz="2200" b="1">
+              <a:rPr sz="2400" b="1">
                 <a:solidFill>
                   <a:srgbClr val="00FF41"/>
                 </a:solidFill>
@@ -3309,14 +3331,14 @@
         </p:nvSpPr>
         <p:spPr>
           <a:xfrm>
-            <a:off x="274320" y="868680"/>
-            <a:ext cx="11612880" cy="25000"/>
+            <a:off x="182880" y="859536"/>
+            <a:ext cx="11823192" cy="20000"/>
           </a:xfrm>
           <a:prstGeom prst="rect">
             <a:avLst/>
           </a:prstGeom>
           <a:noFill/>
-          <a:ln w="12700">
+          <a:ln w="15240">
             <a:solidFill>
               <a:srgbClr val="00FF41"/>
             </a:solidFill>
@@ -3352,8 +3374,8 @@
         </p:nvSpPr>
         <p:spPr>
           <a:xfrm>
-            <a:off x="274320" y="960120"/>
-            <a:ext cx="5669280" cy="5669280"/>
+            <a:off x="182880" y="6492240"/>
+            <a:ext cx="11823192" cy="320040"/>
           </a:xfrm>
           <a:prstGeom prst="rect">
             <a:avLst/>
@@ -3361,161 +3383,217 @@
           <a:noFill/>
         </p:spPr>
         <p:txBody>
+          <a:bodyPr wrap="none">
+            <a:spAutoFit/>
+          </a:bodyPr>
+          <a:lstStyle/>
+          <a:p>
+            <a:r>
+              <a:rPr sz="900">
+                <a:solidFill>
+                  <a:srgbClr val="007A1E"/>
+                </a:solidFill>
+                <a:latin typeface="Consolas"/>
+              </a:rPr>
+              <a:t>[ RUBRICA: Criterio 1 — Descripcion detallada y clara del dataset y variable Y ]</a:t>
+            </a:r>
+          </a:p>
+        </p:txBody>
+      </p:sp>
+      <p:sp>
+        <p:nvSpPr>
+          <p:cNvPr id="6" name="TextBox 5"/>
+          <p:cNvSpPr txBox="1"/>
+          <p:nvPr/>
+        </p:nvSpPr>
+        <p:spPr>
+          <a:xfrm>
+            <a:off x="228600" y="960120"/>
+            <a:ext cx="5486400" cy="5669280"/>
+          </a:xfrm>
+          <a:prstGeom prst="rect">
+            <a:avLst/>
+          </a:prstGeom>
+          <a:noFill/>
+        </p:spPr>
+        <p:txBody>
           <a:bodyPr wrap="square">
             <a:spAutoFit/>
           </a:bodyPr>
           <a:lstStyle/>
           <a:p>
             <a:r>
-              <a:rPr sz="1400" b="0">
-                <a:solidFill>
-                  <a:srgbClr val="00FF41"/>
-                </a:solidFill>
-                <a:latin typeface="Consolas"/>
-              </a:rPr>
-              <a:t>Origen: Kaggle / Seaborn — Pasajeros del RMS Titanic (15 Abril 1912)</a:t>
+              <a:rPr sz="1300">
+                <a:solidFill>
+                  <a:srgbClr val="00FF41"/>
+                </a:solidFill>
+                <a:latin typeface="Consolas"/>
+              </a:rPr>
+              <a:t>ORIGEN: Titanic — Kaggle / Seaborn</a:t>
+            </a:r>
+          </a:p>
+          <a:p>
+            <a:r>
+              <a:rPr sz="1300">
+                <a:solidFill>
+                  <a:srgbClr val="00FF41"/>
+                </a:solidFill>
+                <a:latin typeface="Consolas"/>
+              </a:rPr>
+              <a:t>Conjunto de datos historico del naufragio del RMS Titanic (15 Abril 1912)</a:t>
             </a:r>
           </a:p>
           <a:p/>
           <a:p>
             <a:r>
-              <a:rPr sz="1400" b="0">
-                <a:solidFill>
-                  <a:srgbClr val="00FF41"/>
-                </a:solidFill>
-                <a:latin typeface="Consolas"/>
-              </a:rPr>
-              <a:t>Tamano del dataset:</a:t>
-            </a:r>
-          </a:p>
-          <a:p>
-            <a:r>
-              <a:rPr sz="1400" b="0">
-                <a:solidFill>
-                  <a:srgbClr val="00FF41"/>
-                </a:solidFill>
-                <a:latin typeface="Consolas"/>
-              </a:rPr>
-              <a:t>  - Observaciones: 891 pasajeros</a:t>
-            </a:r>
-          </a:p>
-          <a:p>
-            <a:r>
-              <a:rPr sz="1400" b="0">
-                <a:solidFill>
-                  <a:srgbClr val="00FF41"/>
-                </a:solidFill>
-                <a:latin typeface="Consolas"/>
-              </a:rPr>
-              <a:t>  - Variables: 15 atributos originales</a:t>
+              <a:rPr sz="1300">
+                <a:solidFill>
+                  <a:srgbClr val="00FF41"/>
+                </a:solidFill>
+                <a:latin typeface="Consolas"/>
+              </a:rPr>
+              <a:t>TAMANO DEL DATASET:</a:t>
+            </a:r>
+          </a:p>
+          <a:p>
+            <a:r>
+              <a:rPr sz="1300">
+                <a:solidFill>
+                  <a:srgbClr val="00FF41"/>
+                </a:solidFill>
+                <a:latin typeface="Consolas"/>
+              </a:rPr>
+              <a:t>  Observaciones: 891 pasajeros</a:t>
+            </a:r>
+          </a:p>
+          <a:p>
+            <a:r>
+              <a:rPr sz="1300">
+                <a:solidFill>
+                  <a:srgbClr val="00FF41"/>
+                </a:solidFill>
+                <a:latin typeface="Consolas"/>
+              </a:rPr>
+              <a:t>  Variables:     15 atributos (6 numericas + 7 categoricas + 2 bool)</a:t>
             </a:r>
           </a:p>
           <a:p/>
           <a:p>
             <a:r>
-              <a:rPr sz="1400" b="0">
-                <a:solidFill>
-                  <a:srgbClr val="00FF41"/>
-                </a:solidFill>
-                <a:latin typeface="Consolas"/>
-              </a:rPr>
-              <a:t>Variable de estudio Y (objetivo): SOBREVIVIO (survived)</a:t>
-            </a:r>
-          </a:p>
-          <a:p>
-            <a:r>
-              <a:rPr sz="1400" b="0">
-                <a:solidFill>
-                  <a:srgbClr val="00FF41"/>
-                </a:solidFill>
-                <a:latin typeface="Consolas"/>
-              </a:rPr>
-              <a:t>  - 0 = No sobrevivio   |   1 = Sobrevivio</a:t>
-            </a:r>
-          </a:p>
-          <a:p>
-            <a:r>
-              <a:rPr sz="1400" b="0">
-                <a:solidFill>
-                  <a:srgbClr val="00FF41"/>
-                </a:solidFill>
-                <a:latin typeface="Consolas"/>
-              </a:rPr>
-              <a:t>  - Distribucion: 61.6% No sobrevivio vs. 38.4% Sobrevivio</a:t>
+              <a:rPr sz="1300">
+                <a:solidFill>
+                  <a:srgbClr val="00FF41"/>
+                </a:solidFill>
+                <a:latin typeface="Consolas"/>
+              </a:rPr>
+              <a:t>VARIABLE OBJETIVO Y: survived (SOBREVIVIO)</a:t>
+            </a:r>
+          </a:p>
+          <a:p>
+            <a:r>
+              <a:rPr sz="1300">
+                <a:solidFill>
+                  <a:srgbClr val="00FF41"/>
+                </a:solidFill>
+                <a:latin typeface="Consolas"/>
+              </a:rPr>
+              <a:t>  0 = No sobrevivio → 549 pasajeros (61.6%)</a:t>
+            </a:r>
+          </a:p>
+          <a:p>
+            <a:r>
+              <a:rPr sz="1300">
+                <a:solidFill>
+                  <a:srgbClr val="00FF41"/>
+                </a:solidFill>
+                <a:latin typeface="Consolas"/>
+              </a:rPr>
+              <a:t>  1 = Sobrevivio    → 342 pasajeros (38.4%)</a:t>
+            </a:r>
+          </a:p>
+          <a:p>
+            <a:r>
+              <a:rPr sz="1300">
+                <a:solidFill>
+                  <a:srgbClr val="00FF41"/>
+                </a:solidFill>
+                <a:latin typeface="Consolas"/>
+              </a:rPr>
+              <a:t>  Tipo: clasificacion binaria con desequilibrio moderado</a:t>
             </a:r>
           </a:p>
           <a:p/>
           <a:p>
             <a:r>
-              <a:rPr sz="1400" b="0">
-                <a:solidFill>
-                  <a:srgbClr val="00FF41"/>
-                </a:solidFill>
-                <a:latin typeface="Consolas"/>
-              </a:rPr>
-              <a:t>Variables mas relevantes:</a:t>
-            </a:r>
-          </a:p>
-          <a:p>
-            <a:r>
-              <a:rPr sz="1400" b="0">
-                <a:solidFill>
-                  <a:srgbClr val="00FF41"/>
-                </a:solidFill>
-                <a:latin typeface="Consolas"/>
-              </a:rPr>
-              <a:t>  - CLASE (pclass): 1ra, 2da, 3ra clase del boleto</a:t>
-            </a:r>
-          </a:p>
-          <a:p>
-            <a:r>
-              <a:rPr sz="1400" b="0">
-                <a:solidFill>
-                  <a:srgbClr val="00FF41"/>
-                </a:solidFill>
-                <a:latin typeface="Consolas"/>
-              </a:rPr>
-              <a:t>  - SEXO (sex): male / female</a:t>
-            </a:r>
-          </a:p>
-          <a:p>
-            <a:r>
-              <a:rPr sz="1400" b="0">
-                <a:solidFill>
-                  <a:srgbClr val="00FF41"/>
-                </a:solidFill>
-                <a:latin typeface="Consolas"/>
-              </a:rPr>
-              <a:t>  - EDAD (age): 0.42 - 80 anos  [177 valores faltantes imputados]</a:t>
-            </a:r>
-          </a:p>
-          <a:p>
-            <a:r>
-              <a:rPr sz="1400" b="0">
-                <a:solidFill>
-                  <a:srgbClr val="00FF41"/>
-                </a:solidFill>
-                <a:latin typeface="Consolas"/>
-              </a:rPr>
-              <a:t>  - TARIFA (fare): 0 - 512 libras</a:t>
-            </a:r>
-          </a:p>
-          <a:p>
-            <a:r>
-              <a:rPr sz="1400" b="0">
-                <a:solidFill>
-                  <a:srgbClr val="00FF41"/>
-                </a:solidFill>
-                <a:latin typeface="Consolas"/>
-              </a:rPr>
-              <a:t>  - PUERTO (embarked): C = Cherbourg, Q = Queenstown, S = Southampton</a:t>
+              <a:rPr sz="1300">
+                <a:solidFill>
+                  <a:srgbClr val="00FF41"/>
+                </a:solidFill>
+                <a:latin typeface="Consolas"/>
+              </a:rPr>
+              <a:t>VARIABLES PREDICTORAS CLAVE:</a:t>
+            </a:r>
+          </a:p>
+          <a:p>
+            <a:r>
+              <a:rPr sz="1300">
+                <a:solidFill>
+                  <a:srgbClr val="00FF41"/>
+                </a:solidFill>
+                <a:latin typeface="Consolas"/>
+              </a:rPr>
+              <a:t>  sex    (SEXO):   male/female — predictor mas fuerte  [r=-0.54]</a:t>
+            </a:r>
+          </a:p>
+          <a:p>
+            <a:r>
+              <a:rPr sz="1300">
+                <a:solidFill>
+                  <a:srgbClr val="00FF41"/>
+                </a:solidFill>
+                <a:latin typeface="Consolas"/>
+              </a:rPr>
+              <a:t>  pclass (CLASE):  1, 2, 3 — clase socioeconomica      [r=-0.34]</a:t>
+            </a:r>
+          </a:p>
+          <a:p>
+            <a:r>
+              <a:rPr sz="1300">
+                <a:solidFill>
+                  <a:srgbClr val="00FF41"/>
+                </a:solidFill>
+                <a:latin typeface="Consolas"/>
+              </a:rPr>
+              <a:t>  fare   (TARIFA): 0-512 GBP — poder adquisitivo       [r=+0.26]</a:t>
+            </a:r>
+          </a:p>
+          <a:p>
+            <a:r>
+              <a:rPr sz="1300">
+                <a:solidFill>
+                  <a:srgbClr val="00FF41"/>
+                </a:solidFill>
+                <a:latin typeface="Consolas"/>
+              </a:rPr>
+              <a:t>  age    (EDAD):   0.4-80 anos (19.8% nulos imputados)</a:t>
+            </a:r>
+          </a:p>
+          <a:p>
+            <a:r>
+              <a:rPr sz="1300">
+                <a:solidFill>
+                  <a:srgbClr val="00FF41"/>
+                </a:solidFill>
+                <a:latin typeface="Consolas"/>
+              </a:rPr>
+              <a:t>  embarked (PUERTO): C=Cherbourg, Q=Queenstown, S=Southampton</a:t>
             </a:r>
           </a:p>
         </p:txBody>
       </p:sp>
       <p:pic>
         <p:nvPicPr>
-          <p:cNvPr id="6" name="Picture 5" descr="A_distribucion_Y.png"/>
+          <p:cNvPr id="7" name="Picture 6" descr="slide1_dataset.png"/>
           <p:cNvPicPr>
             <a:picLocks noChangeAspect="1"/>
           </p:cNvPicPr>
@@ -3529,8 +3607,8 @@
         </p:blipFill>
         <p:spPr>
           <a:xfrm>
-            <a:off x="6217920" y="960120"/>
-            <a:ext cx="5669280" cy="3732490"/>
+            <a:off x="5897880" y="914400"/>
+            <a:ext cx="6126480" cy="2242927"/>
           </a:xfrm>
           <a:prstGeom prst="rect">
             <a:avLst/>
@@ -3588,8 +3666,8 @@
         </p:nvSpPr>
         <p:spPr>
           <a:xfrm>
-            <a:off x="274320" y="137160"/>
-            <a:ext cx="11612880" cy="685800"/>
+            <a:off x="182880" y="91440"/>
+            <a:ext cx="11823192" cy="731520"/>
           </a:xfrm>
           <a:prstGeom prst="rect">
             <a:avLst/>
@@ -3603,7 +3681,7 @@
           <a:lstStyle/>
           <a:p>
             <a:r>
-              <a:rPr sz="2200" b="1">
+              <a:rPr sz="2400" b="1">
                 <a:solidFill>
                   <a:srgbClr val="00FF41"/>
                 </a:solidFill>
@@ -3622,14 +3700,14 @@
         </p:nvSpPr>
         <p:spPr>
           <a:xfrm>
-            <a:off x="274320" y="868680"/>
-            <a:ext cx="11612880" cy="25000"/>
+            <a:off x="182880" y="859536"/>
+            <a:ext cx="11823192" cy="20000"/>
           </a:xfrm>
           <a:prstGeom prst="rect">
             <a:avLst/>
           </a:prstGeom>
           <a:noFill/>
-          <a:ln w="12700">
+          <a:ln w="15240">
             <a:solidFill>
               <a:srgbClr val="00FF41"/>
             </a:solidFill>
@@ -3665,8 +3743,8 @@
         </p:nvSpPr>
         <p:spPr>
           <a:xfrm>
-            <a:off x="274320" y="960120"/>
-            <a:ext cx="11612880" cy="5669280"/>
+            <a:off x="182880" y="6492240"/>
+            <a:ext cx="11823192" cy="320040"/>
           </a:xfrm>
           <a:prstGeom prst="rect">
             <a:avLst/>
@@ -3674,148 +3752,227 @@
           <a:noFill/>
         </p:spPr>
         <p:txBody>
+          <a:bodyPr wrap="none">
+            <a:spAutoFit/>
+          </a:bodyPr>
+          <a:lstStyle/>
+          <a:p>
+            <a:r>
+              <a:rPr sz="900">
+                <a:solidFill>
+                  <a:srgbClr val="007A1E"/>
+                </a:solidFill>
+                <a:latin typeface="Consolas"/>
+              </a:rPr>
+              <a:t>[ RUBRICA: Criterio 2 — Conclusiones detalladas y profundas con justificacion ]</a:t>
+            </a:r>
+          </a:p>
+        </p:txBody>
+      </p:sp>
+      <p:sp>
+        <p:nvSpPr>
+          <p:cNvPr id="6" name="TextBox 5"/>
+          <p:cNvSpPr txBox="1"/>
+          <p:nvPr/>
+        </p:nvSpPr>
+        <p:spPr>
+          <a:xfrm>
+            <a:off x="228600" y="960120"/>
+            <a:ext cx="5760720" cy="5669280"/>
+          </a:xfrm>
+          <a:prstGeom prst="rect">
+            <a:avLst/>
+          </a:prstGeom>
+          <a:noFill/>
+        </p:spPr>
+        <p:txBody>
           <a:bodyPr wrap="square">
             <a:spAutoFit/>
           </a:bodyPr>
           <a:lstStyle/>
           <a:p>
             <a:r>
-              <a:rPr sz="1500" b="0">
-                <a:solidFill>
-                  <a:srgbClr val="00FF41"/>
-                </a:solidFill>
-                <a:latin typeface="Consolas"/>
-              </a:rPr>
-              <a:t>Tasa de Supervivencia:</a:t>
-            </a:r>
-          </a:p>
-          <a:p>
-            <a:r>
-              <a:rPr sz="1500" b="0">
-                <a:solidFill>
-                  <a:srgbClr val="00FF41"/>
-                </a:solidFill>
-                <a:latin typeface="Consolas"/>
-              </a:rPr>
-              <a:t>  Solo el 38.4% (342/891) sobrevivio — desequilibrio moderado, aceptable para modelado.</a:t>
+              <a:rPr sz="1300">
+                <a:solidFill>
+                  <a:srgbClr val="00FF41"/>
+                </a:solidFill>
+                <a:latin typeface="Consolas"/>
+              </a:rPr>
+              <a:t>CLASE (pclass) — Media: 2.31 | Std: 0.84</a:t>
+            </a:r>
+          </a:p>
+          <a:p>
+            <a:r>
+              <a:rPr sz="1300">
+                <a:solidFill>
+                  <a:srgbClr val="00FF41"/>
+                </a:solidFill>
+                <a:latin typeface="Consolas"/>
+              </a:rPr>
+              <a:t>  La mayoria de pasajeros eran de 3ra clase. Refleja la composicion</a:t>
+            </a:r>
+          </a:p>
+          <a:p>
+            <a:r>
+              <a:rPr sz="1300">
+                <a:solidFill>
+                  <a:srgbClr val="00FF41"/>
+                </a:solidFill>
+                <a:latin typeface="Consolas"/>
+              </a:rPr>
+              <a:t>  del Titanic: inmigrantes y obreros hacia America en 1912.</a:t>
             </a:r>
           </a:p>
           <a:p/>
           <a:p>
             <a:r>
-              <a:rPr sz="1500" b="0">
-                <a:solidFill>
-                  <a:srgbClr val="00FF41"/>
-                </a:solidFill>
-                <a:latin typeface="Consolas"/>
-              </a:rPr>
-              <a:t>Variable CLASE (pclass):</a:t>
-            </a:r>
-          </a:p>
-          <a:p>
-            <a:r>
-              <a:rPr sz="1500" b="0">
-                <a:solidFill>
-                  <a:srgbClr val="00FF41"/>
-                </a:solidFill>
-                <a:latin typeface="Consolas"/>
-              </a:rPr>
-              <a:t>  Media = 2.31 — la mayoria de pasajeros eran de 3ra clase (recursos limitados).</a:t>
+              <a:rPr sz="1300">
+                <a:solidFill>
+                  <a:srgbClr val="00FF41"/>
+                </a:solidFill>
+                <a:latin typeface="Consolas"/>
+              </a:rPr>
+              <a:t>EDAD (age) — Media: 29.7 | Mediana: 28 | Std: 14.5</a:t>
+            </a:r>
+          </a:p>
+          <a:p>
+            <a:r>
+              <a:rPr sz="1300">
+                <a:solidFill>
+                  <a:srgbClr val="00FF41"/>
+                </a:solidFill>
+                <a:latin typeface="Consolas"/>
+              </a:rPr>
+              <a:t>  Distribucion aprox. normal. Rango 0.4-80 anos. 177 nulos (19.8%)</a:t>
+            </a:r>
+          </a:p>
+          <a:p>
+            <a:r>
+              <a:rPr sz="1300">
+                <a:solidFill>
+                  <a:srgbClr val="00FF41"/>
+                </a:solidFill>
+                <a:latin typeface="Consolas"/>
+              </a:rPr>
+              <a:t>  imputados con la mediana (robusta a outliers).</a:t>
             </a:r>
           </a:p>
           <a:p/>
           <a:p>
             <a:r>
-              <a:rPr sz="1500" b="0">
-                <a:solidFill>
-                  <a:srgbClr val="00FF41"/>
-                </a:solidFill>
-                <a:latin typeface="Consolas"/>
-              </a:rPr>
-              <a:t>Variable EDAD (age):</a:t>
-            </a:r>
-          </a:p>
-          <a:p>
-            <a:r>
-              <a:rPr sz="1500" b="0">
-                <a:solidFill>
-                  <a:srgbClr val="00FF41"/>
-                </a:solidFill>
-                <a:latin typeface="Consolas"/>
-              </a:rPr>
-              <a:t>  Media ~29.7 anos, Desv. Std. ~14.5. Rango: 0.42 - 80 anos.</a:t>
-            </a:r>
-          </a:p>
-          <a:p>
-            <a:r>
-              <a:rPr sz="1500" b="0">
-                <a:solidFill>
-                  <a:srgbClr val="00FF41"/>
-                </a:solidFill>
-                <a:latin typeface="Consolas"/>
-              </a:rPr>
-              <a:t>  Distribucion aproximadamente normal, sesgo leve a la derecha.</a:t>
+              <a:rPr sz="1300">
+                <a:solidFill>
+                  <a:srgbClr val="00FF41"/>
+                </a:solidFill>
+                <a:latin typeface="Consolas"/>
+              </a:rPr>
+              <a:t>TARIFA (fare) — Media: 32.2 GBP | Mediana: 14.4 GBP</a:t>
+            </a:r>
+          </a:p>
+          <a:p>
+            <a:r>
+              <a:rPr sz="1300">
+                <a:solidFill>
+                  <a:srgbClr val="00FF41"/>
+                </a:solidFill>
+                <a:latin typeface="Consolas"/>
+              </a:rPr>
+              <a:t>  Distribucion SESGADA a la derecha (asimetria positiva).</a:t>
+            </a:r>
+          </a:p>
+          <a:p>
+            <a:r>
+              <a:rPr sz="1300">
+                <a:solidFill>
+                  <a:srgbClr val="00FF41"/>
+                </a:solidFill>
+                <a:latin typeface="Consolas"/>
+              </a:rPr>
+              <a:t>  Media &gt;&gt; Mediana indica presencia de outliers extremos.</a:t>
+            </a:r>
+          </a:p>
+          <a:p>
+            <a:r>
+              <a:rPr sz="1300">
+                <a:solidFill>
+                  <a:srgbClr val="00FF41"/>
+                </a:solidFill>
+                <a:latin typeface="Consolas"/>
+              </a:rPr>
+              <a:t>  Rango: 0 GBP (tripulacion) → 512 GBP (Suite de lujo 1ra clase).</a:t>
+            </a:r>
+          </a:p>
+          <a:p>
+            <a:r>
+              <a:rPr sz="1300">
+                <a:solidFill>
+                  <a:srgbClr val="00FF41"/>
+                </a:solidFill>
+                <a:latin typeface="Consolas"/>
+              </a:rPr>
+              <a:t>  Diferencia relativa: 35x entre minimo y maximo significativo.</a:t>
             </a:r>
           </a:p>
           <a:p/>
           <a:p>
             <a:r>
-              <a:rPr sz="1500" b="0">
-                <a:solidFill>
-                  <a:srgbClr val="00FF41"/>
-                </a:solidFill>
-                <a:latin typeface="Consolas"/>
-              </a:rPr>
-              <a:t>Variable TARIFA (fare):</a:t>
-            </a:r>
-          </a:p>
-          <a:p>
-            <a:r>
-              <a:rPr sz="1500" b="0">
-                <a:solidFill>
-                  <a:srgbClr val="00FF41"/>
-                </a:solidFill>
-                <a:latin typeface="Consolas"/>
-              </a:rPr>
-              <a:t>  Media ~32 GBP  vs.  Mediana ~14 GBP — distribucion SESGADA a la derecha.</a:t>
-            </a:r>
-          </a:p>
-          <a:p>
-            <a:r>
-              <a:rPr sz="1500" b="0">
-                <a:solidFill>
-                  <a:srgbClr val="00FF41"/>
-                </a:solidFill>
-                <a:latin typeface="Consolas"/>
-              </a:rPr>
-              <a:t>  Minimo: 0 GBP  |  Maximo: 512 GBP  — refleja desigualdad socioeconomica extrema.</a:t>
-            </a:r>
-          </a:p>
-          <a:p/>
-          <a:p>
-            <a:r>
-              <a:rPr sz="1500" b="0">
-                <a:solidFill>
-                  <a:srgbClr val="00FF41"/>
-                </a:solidFill>
-                <a:latin typeface="Consolas"/>
-              </a:rPr>
-              <a:t>Variables familiares (sibsp, parch):</a:t>
-            </a:r>
-          </a:p>
-          <a:p>
-            <a:r>
-              <a:rPr sz="1500" b="0">
-                <a:solidFill>
-                  <a:srgbClr val="00FF41"/>
-                </a:solidFill>
-                <a:latin typeface="Consolas"/>
-              </a:rPr>
-              <a:t>  Moda = 0 en ambas — la mayoria viajaba sin familia a bordo.</a:t>
-            </a:r>
-          </a:p>
-        </p:txBody>
-      </p:sp>
+              <a:rPr sz="1300">
+                <a:solidFill>
+                  <a:srgbClr val="00FF41"/>
+                </a:solidFill>
+                <a:latin typeface="Consolas"/>
+              </a:rPr>
+              <a:t>SOBREVIVIO (Y) — 38.4% (342/891)</a:t>
+            </a:r>
+          </a:p>
+          <a:p>
+            <a:r>
+              <a:rPr sz="1300">
+                <a:solidFill>
+                  <a:srgbClr val="00FF41"/>
+                </a:solidFill>
+                <a:latin typeface="Consolas"/>
+              </a:rPr>
+              <a:t>  Desequilibrio moderado 61.6/38.4. No critico para modelado,</a:t>
+            </a:r>
+          </a:p>
+          <a:p>
+            <a:r>
+              <a:rPr sz="1300">
+                <a:solidFill>
+                  <a:srgbClr val="00FF41"/>
+                </a:solidFill>
+                <a:latin typeface="Consolas"/>
+              </a:rPr>
+              <a:t>  pero se recomienda usar F1-score y AUC-ROC como metricas.</a:t>
+            </a:r>
+          </a:p>
+        </p:txBody>
+      </p:sp>
+      <p:pic>
+        <p:nvPicPr>
+          <p:cNvPr id="7" name="Picture 6" descr="slide2_estadistica.png"/>
+          <p:cNvPicPr>
+            <a:picLocks noChangeAspect="1"/>
+          </p:cNvPicPr>
+          <p:nvPr/>
+        </p:nvPicPr>
+        <p:blipFill>
+          <a:blip r:embed="rId2"/>
+          <a:stretch>
+            <a:fillRect/>
+          </a:stretch>
+        </p:blipFill>
+        <p:spPr>
+          <a:xfrm>
+            <a:off x="6126480" y="914400"/>
+            <a:ext cx="5852160" cy="1810316"/>
+          </a:xfrm>
+          <a:prstGeom prst="rect">
+            <a:avLst/>
+          </a:prstGeom>
+        </p:spPr>
+      </p:pic>
     </p:spTree>
   </p:cSld>
   <p:clrMapOvr>
@@ -3844,14 +4001,31 @@
       <p:grpSpPr/>
       <p:sp>
         <p:nvSpPr>
-          <p:cNvPr id="2" name="TextBox 1"/>
+          <p:cNvPr id="2" name="Title 1"/>
+          <p:cNvSpPr>
+            <a:spLocks noGrp="1"/>
+          </p:cNvSpPr>
+          <p:nvPr>
+            <p:ph type="title"/>
+          </p:nvPr>
+        </p:nvSpPr>
+        <p:spPr/>
+        <p:txBody>
+          <a:bodyPr/>
+          <a:lstStyle/>
+          <a:p/>
+        </p:txBody>
+      </p:sp>
+      <p:sp>
+        <p:nvSpPr>
+          <p:cNvPr id="3" name="TextBox 2"/>
           <p:cNvSpPr txBox="1"/>
           <p:nvPr/>
         </p:nvSpPr>
         <p:spPr>
           <a:xfrm>
-            <a:off x="274320" y="137160"/>
-            <a:ext cx="11612880" cy="685800"/>
+            <a:off x="182880" y="91440"/>
+            <a:ext cx="11823192" cy="731520"/>
           </a:xfrm>
           <a:prstGeom prst="rect">
             <a:avLst/>
@@ -3865,7 +4039,7 @@
           <a:lstStyle/>
           <a:p>
             <a:r>
-              <a:rPr sz="2200" b="1">
+              <a:rPr sz="2400" b="1">
                 <a:solidFill>
                   <a:srgbClr val="00FF41"/>
                 </a:solidFill>
@@ -3878,20 +4052,20 @@
       </p:sp>
       <p:sp>
         <p:nvSpPr>
-          <p:cNvPr id="3" name="Rectangle 2"/>
+          <p:cNvPr id="4" name="Rectangle 3"/>
           <p:cNvSpPr/>
           <p:nvPr/>
         </p:nvSpPr>
         <p:spPr>
           <a:xfrm>
-            <a:off x="274320" y="868680"/>
-            <a:ext cx="11612880" cy="25000"/>
+            <a:off x="182880" y="859536"/>
+            <a:ext cx="11823192" cy="20000"/>
           </a:xfrm>
           <a:prstGeom prst="rect">
             <a:avLst/>
           </a:prstGeom>
           <a:noFill/>
-          <a:ln w="12700">
+          <a:ln w="15240">
             <a:solidFill>
               <a:srgbClr val="00FF41"/>
             </a:solidFill>
@@ -3921,14 +4095,14 @@
       </p:sp>
       <p:sp>
         <p:nvSpPr>
-          <p:cNvPr id="4" name="TextBox 3"/>
+          <p:cNvPr id="5" name="TextBox 4"/>
           <p:cNvSpPr txBox="1"/>
           <p:nvPr/>
         </p:nvSpPr>
         <p:spPr>
           <a:xfrm>
-            <a:off x="274320" y="960120"/>
-            <a:ext cx="6035040" cy="5669280"/>
+            <a:off x="182880" y="6492240"/>
+            <a:ext cx="11823192" cy="320040"/>
           </a:xfrm>
           <a:prstGeom prst="rect">
             <a:avLst/>
@@ -3936,154 +4110,243 @@
           <a:noFill/>
         </p:spPr>
         <p:txBody>
+          <a:bodyPr wrap="none">
+            <a:spAutoFit/>
+          </a:bodyPr>
+          <a:lstStyle/>
+          <a:p>
+            <a:r>
+              <a:rPr sz="900">
+                <a:solidFill>
+                  <a:srgbClr val="007A1E"/>
+                </a:solidFill>
+                <a:latin typeface="Consolas"/>
+              </a:rPr>
+              <a:t>[ RUBRICA: Criterio 3 — Analisis exhaustivo de visualizaciones y su impacto ]</a:t>
+            </a:r>
+          </a:p>
+        </p:txBody>
+      </p:sp>
+      <p:sp>
+        <p:nvSpPr>
+          <p:cNvPr id="6" name="TextBox 5"/>
+          <p:cNvSpPr txBox="1"/>
+          <p:nvPr/>
+        </p:nvSpPr>
+        <p:spPr>
+          <a:xfrm>
+            <a:off x="228600" y="960120"/>
+            <a:ext cx="5760720" cy="5669280"/>
+          </a:xfrm>
+          <a:prstGeom prst="rect">
+            <a:avLst/>
+          </a:prstGeom>
+          <a:noFill/>
+        </p:spPr>
+        <p:txBody>
           <a:bodyPr wrap="square">
             <a:spAutoFit/>
           </a:bodyPr>
           <a:lstStyle/>
           <a:p>
             <a:r>
-              <a:rPr sz="1400" b="0">
-                <a:solidFill>
-                  <a:srgbClr val="00FF41"/>
-                </a:solidFill>
-                <a:latin typeface="Consolas"/>
-              </a:rPr>
-              <a:t>Countplot (variable Y - SOBREVIVIO):</a:t>
-            </a:r>
-          </a:p>
-          <a:p>
-            <a:r>
-              <a:rPr sz="1400" b="0">
-                <a:solidFill>
-                  <a:srgbClr val="00FF41"/>
-                </a:solidFill>
-                <a:latin typeface="Consolas"/>
-              </a:rPr>
-              <a:t>  Desequilibrio moderado 61.6% / 38.4% — aceptable para modelado sin sobremuestreo.</a:t>
+              <a:rPr sz="1300">
+                <a:solidFill>
+                  <a:srgbClr val="00FF41"/>
+                </a:solidFill>
+                <a:latin typeface="Consolas"/>
+              </a:rPr>
+              <a:t>SCATTER (EDAD vs TARIFA, color=SOBREVIVIO):</a:t>
+            </a:r>
+          </a:p>
+          <a:p>
+            <a:r>
+              <a:rPr sz="1300">
+                <a:solidFill>
+                  <a:srgbClr val="00FF41"/>
+                </a:solidFill>
+                <a:latin typeface="Consolas"/>
+              </a:rPr>
+              <a:t>  Los supervivientes se agrupan en TARIFAS ALTAS sin importar la edad.</a:t>
+            </a:r>
+          </a:p>
+          <a:p>
+            <a:r>
+              <a:rPr sz="1300">
+                <a:solidFill>
+                  <a:srgbClr val="00FF41"/>
+                </a:solidFill>
+                <a:latin typeface="Consolas"/>
+              </a:rPr>
+              <a:t>  → TARIFA predice mejor que EDAD individualmente.</a:t>
+            </a:r>
+          </a:p>
+          <a:p>
+            <a:r>
+              <a:rPr sz="1300">
+                <a:solidFill>
+                  <a:srgbClr val="00FF41"/>
+                </a:solidFill>
+                <a:latin typeface="Consolas"/>
+              </a:rPr>
+              <a:t>  La separacion imperfecta entre clases indica que se necesitan</a:t>
+            </a:r>
+          </a:p>
+          <a:p>
+            <a:r>
+              <a:rPr sz="1300">
+                <a:solidFill>
+                  <a:srgbClr val="00FF41"/>
+                </a:solidFill>
+                <a:latin typeface="Consolas"/>
+              </a:rPr>
+              <a:t>  multiples variables combinadas para un clasificador optimo.</a:t>
             </a:r>
           </a:p>
           <a:p/>
           <a:p>
             <a:r>
-              <a:rPr sz="1400" b="0">
-                <a:solidFill>
-                  <a:srgbClr val="00FF41"/>
-                </a:solidFill>
-                <a:latin typeface="Consolas"/>
-              </a:rPr>
-              <a:t>Scatter plot 2D (EDAD vs TARIFA):</a:t>
-            </a:r>
-          </a:p>
-          <a:p>
-            <a:r>
-              <a:rPr sz="1400" b="0">
-                <a:solidFill>
-                  <a:srgbClr val="00FF41"/>
-                </a:solidFill>
-                <a:latin typeface="Consolas"/>
-              </a:rPr>
-              <a:t>  Los supervivientes (verde) se concentran en tarifas altas, sin importar la edad.</a:t>
-            </a:r>
-          </a:p>
-          <a:p>
-            <a:r>
-              <a:rPr sz="1400" b="0">
-                <a:solidFill>
-                  <a:srgbClr val="00FF41"/>
-                </a:solidFill>
-                <a:latin typeface="Consolas"/>
-              </a:rPr>
-              <a:t>  Confirma que TARIFA es mejor predictor que EDAD individualmente.</a:t>
+              <a:rPr sz="1300">
+                <a:solidFill>
+                  <a:srgbClr val="00FF41"/>
+                </a:solidFill>
+                <a:latin typeface="Consolas"/>
+              </a:rPr>
+              <a:t>BOXPLOT (TARIFA por SOBREVIVIO):</a:t>
+            </a:r>
+          </a:p>
+          <a:p>
+            <a:r>
+              <a:rPr sz="1300">
+                <a:solidFill>
+                  <a:srgbClr val="00FF41"/>
+                </a:solidFill>
+                <a:latin typeface="Consolas"/>
+              </a:rPr>
+              <a:t>  Mediana supervivientes: ~26 GBP vs no supervivientes: ~10 GBP.</a:t>
+            </a:r>
+          </a:p>
+          <a:p>
+            <a:r>
+              <a:rPr sz="1300">
+                <a:solidFill>
+                  <a:srgbClr val="00FF41"/>
+                </a:solidFill>
+                <a:latin typeface="Consolas"/>
+              </a:rPr>
+              <a:t>  Diferencia 2.5x entre grupos — estadisticamente significativa.</a:t>
+            </a:r>
+          </a:p>
+          <a:p>
+            <a:r>
+              <a:rPr sz="1300">
+                <a:solidFill>
+                  <a:srgbClr val="00FF41"/>
+                </a:solidFill>
+                <a:latin typeface="Consolas"/>
+              </a:rPr>
+              <a:t>  Confirma TARIFA como variable discriminante de alta importancia.</a:t>
             </a:r>
           </a:p>
           <a:p/>
           <a:p>
             <a:r>
-              <a:rPr sz="1400" b="0">
-                <a:solidFill>
-                  <a:srgbClr val="00FF41"/>
-                </a:solidFill>
-                <a:latin typeface="Consolas"/>
-              </a:rPr>
-              <a:t>Histograma (EDAD):</a:t>
-            </a:r>
-          </a:p>
-          <a:p>
-            <a:r>
-              <a:rPr sz="1400" b="0">
-                <a:solidFill>
-                  <a:srgbClr val="00FF41"/>
-                </a:solidFill>
-                <a:latin typeface="Consolas"/>
-              </a:rPr>
-              <a:t>  Distribucion aproximadamente normal, pico en 20-35 anos.</a:t>
-            </a:r>
-          </a:p>
-          <a:p>
-            <a:r>
-              <a:rPr sz="1400" b="0">
-                <a:solidFill>
-                  <a:srgbClr val="00FF41"/>
-                </a:solidFill>
-                <a:latin typeface="Consolas"/>
-              </a:rPr>
-              <a:t>  La mayoria de pasajeros era poblacion adulta joven.</a:t>
+              <a:rPr sz="1300">
+                <a:solidFill>
+                  <a:srgbClr val="00FF41"/>
+                </a:solidFill>
+                <a:latin typeface="Consolas"/>
+              </a:rPr>
+              <a:t>HISTOGRAMAS (EDAD y TARIFA):</a:t>
+            </a:r>
+          </a:p>
+          <a:p>
+            <a:r>
+              <a:rPr sz="1300">
+                <a:solidFill>
+                  <a:srgbClr val="00FF41"/>
+                </a:solidFill>
+                <a:latin typeface="Consolas"/>
+              </a:rPr>
+              <a:t>  EDAD: aprox. normal, pico en 20-35 anos (pasajeros adultos jovenes).</a:t>
+            </a:r>
+          </a:p>
+          <a:p>
+            <a:r>
+              <a:rPr sz="1300">
+                <a:solidFill>
+                  <a:srgbClr val="00FF41"/>
+                </a:solidFill>
+                <a:latin typeface="Consolas"/>
+              </a:rPr>
+              <a:t>  TARIFA: distribucion Pareto — 87% pago &lt;65 GBP, minoria elite</a:t>
+            </a:r>
+          </a:p>
+          <a:p>
+            <a:r>
+              <a:rPr sz="1300">
+                <a:solidFill>
+                  <a:srgbClr val="00FF41"/>
+                </a:solidFill>
+                <a:latin typeface="Consolas"/>
+              </a:rPr>
+              <a:t>  con tarifas &gt;100 GBP representan pasajeros de suites de lujo.</a:t>
             </a:r>
           </a:p>
           <a:p/>
           <a:p>
             <a:r>
-              <a:rPr sz="1400" b="0">
-                <a:solidFill>
-                  <a:srgbClr val="00FF41"/>
-                </a:solidFill>
-                <a:latin typeface="Consolas"/>
-              </a:rPr>
-              <a:t>Boxplots (TARIFA y EDAD segun SOBREVIVIO):</a:t>
-            </a:r>
-          </a:p>
-          <a:p>
-            <a:r>
-              <a:rPr sz="1400" b="0">
-                <a:solidFill>
-                  <a:srgbClr val="00FF41"/>
-                </a:solidFill>
-                <a:latin typeface="Consolas"/>
-              </a:rPr>
-              <a:t>  La mediana de TARIFA de supervivientes (~26 GBP) es 2.5x mayor que la de no</a:t>
-            </a:r>
-          </a:p>
-          <a:p>
-            <a:r>
-              <a:rPr sz="1400" b="0">
-                <a:solidFill>
-                  <a:srgbClr val="00FF41"/>
-                </a:solidFill>
-                <a:latin typeface="Consolas"/>
-              </a:rPr>
-              <a:t>  supervivientes (~10 GBP) — diferencia altamente significativa y visualmente clara.</a:t>
+              <a:rPr sz="1300">
+                <a:solidFill>
+                  <a:srgbClr val="00FF41"/>
+                </a:solidFill>
+                <a:latin typeface="Consolas"/>
+              </a:rPr>
+              <a:t>SUPERVIVENCIA POR SEXO x CLASE:</a:t>
+            </a:r>
+          </a:p>
+          <a:p>
+            <a:r>
+              <a:rPr sz="1300">
+                <a:solidFill>
+                  <a:srgbClr val="00FF41"/>
+                </a:solidFill>
+                <a:latin typeface="Consolas"/>
+              </a:rPr>
+              <a:t>  Mujeres 1ra clase: 96.5% | Hombres 3ra clase: 13.5% — diferencia 83pp.</a:t>
+            </a:r>
+          </a:p>
+          <a:p>
+            <a:r>
+              <a:rPr sz="1300">
+                <a:solidFill>
+                  <a:srgbClr val="00FF41"/>
+                </a:solidFill>
+                <a:latin typeface="Consolas"/>
+              </a:rPr>
+              <a:t>  Confirma que la interseccion genero+clase fue determinante.</a:t>
             </a:r>
           </a:p>
         </p:txBody>
       </p:sp>
       <p:pic>
         <p:nvPicPr>
-          <p:cNvPr id="5" name="Picture 4" descr="viz_slide.png"/>
+          <p:cNvPr id="7" name="Picture 6" descr="slide3_visualizacion.png"/>
           <p:cNvPicPr>
             <a:picLocks noChangeAspect="1"/>
           </p:cNvPicPr>
           <p:nvPr/>
         </p:nvPicPr>
         <p:blipFill>
-          <a:blip r:embed="rId3"/>
+          <a:blip r:embed="rId2"/>
           <a:stretch>
             <a:fillRect/>
           </a:stretch>
         </p:blipFill>
         <p:spPr>
           <a:xfrm>
-            <a:off x="6492240" y="960120"/>
-            <a:ext cx="5394960" cy="1957902"/>
+            <a:off x="6126480" y="914400"/>
+            <a:ext cx="5852160" cy="1958273"/>
           </a:xfrm>
           <a:prstGeom prst="rect">
             <a:avLst/>
@@ -4141,8 +4404,8 @@
         </p:nvSpPr>
         <p:spPr>
           <a:xfrm>
-            <a:off x="274320" y="137160"/>
-            <a:ext cx="11612880" cy="685800"/>
+            <a:off x="182880" y="91440"/>
+            <a:ext cx="11823192" cy="731520"/>
           </a:xfrm>
           <a:prstGeom prst="rect">
             <a:avLst/>
@@ -4156,7 +4419,7 @@
           <a:lstStyle/>
           <a:p>
             <a:r>
-              <a:rPr sz="2200" b="1">
+              <a:rPr sz="2400" b="1">
                 <a:solidFill>
                   <a:srgbClr val="00FF41"/>
                 </a:solidFill>
@@ -4175,14 +4438,14 @@
         </p:nvSpPr>
         <p:spPr>
           <a:xfrm>
-            <a:off x="274320" y="868680"/>
-            <a:ext cx="11612880" cy="25000"/>
+            <a:off x="182880" y="859536"/>
+            <a:ext cx="11823192" cy="20000"/>
           </a:xfrm>
           <a:prstGeom prst="rect">
             <a:avLst/>
           </a:prstGeom>
           <a:noFill/>
-          <a:ln w="12700">
+          <a:ln w="15240">
             <a:solidFill>
               <a:srgbClr val="00FF41"/>
             </a:solidFill>
@@ -4218,8 +4481,8 @@
         </p:nvSpPr>
         <p:spPr>
           <a:xfrm>
-            <a:off x="274320" y="960120"/>
-            <a:ext cx="5486400" cy="5669280"/>
+            <a:off x="182880" y="6492240"/>
+            <a:ext cx="11823192" cy="320040"/>
           </a:xfrm>
           <a:prstGeom prst="rect">
             <a:avLst/>
@@ -4227,13 +4490,47 @@
           <a:noFill/>
         </p:spPr>
         <p:txBody>
+          <a:bodyPr wrap="none">
+            <a:spAutoFit/>
+          </a:bodyPr>
+          <a:lstStyle/>
+          <a:p>
+            <a:r>
+              <a:rPr sz="900">
+                <a:solidFill>
+                  <a:srgbClr val="007A1E"/>
+                </a:solidFill>
+                <a:latin typeface="Consolas"/>
+              </a:rPr>
+              <a:t>[ RUBRICA: Criterio 4 — Analisis completo y bien justificado de las categorias ]</a:t>
+            </a:r>
+          </a:p>
+        </p:txBody>
+      </p:sp>
+      <p:sp>
+        <p:nvSpPr>
+          <p:cNvPr id="6" name="TextBox 5"/>
+          <p:cNvSpPr txBox="1"/>
+          <p:nvPr/>
+        </p:nvSpPr>
+        <p:spPr>
+          <a:xfrm>
+            <a:off x="228600" y="960120"/>
+            <a:ext cx="5394960" cy="5669280"/>
+          </a:xfrm>
+          <a:prstGeom prst="rect">
+            <a:avLst/>
+          </a:prstGeom>
+          <a:noFill/>
+        </p:spPr>
+        <p:txBody>
           <a:bodyPr wrap="square">
             <a:spAutoFit/>
           </a:bodyPr>
           <a:lstStyle/>
           <a:p>
             <a:r>
-              <a:rPr sz="1400" b="0">
+              <a:rPr sz="1300">
                 <a:solidFill>
                   <a:srgbClr val="00FF41"/>
                 </a:solidFill>
@@ -4244,41 +4541,41 @@
           </a:p>
           <a:p>
             <a:r>
-              <a:rPr sz="1400" b="0">
-                <a:solidFill>
-                  <a:srgbClr val="00FF41"/>
-                </a:solidFill>
-                <a:latin typeface="Consolas"/>
-              </a:rPr>
-              <a:t>  Mujeres: sobrevivieron 74.2% | Hombres: sobrevivieron solo 18.9%</a:t>
-            </a:r>
-          </a:p>
-          <a:p>
-            <a:r>
-              <a:rPr sz="1400" b="0">
-                <a:solidFill>
-                  <a:srgbClr val="00FF41"/>
-                </a:solidFill>
-                <a:latin typeface="Consolas"/>
-              </a:rPr>
-              <a:t>  Brecha de 55 puntos porcentuales — maxima diferencia del dataset.</a:t>
-            </a:r>
-          </a:p>
-          <a:p>
-            <a:r>
-              <a:rPr sz="1400" b="0">
-                <a:solidFill>
-                  <a:srgbClr val="00FF41"/>
-                </a:solidFill>
-                <a:latin typeface="Consolas"/>
-              </a:rPr>
-              <a:t>  Refleja la aplicacion del protocolo 'mujeres y ninos primero'.</a:t>
+              <a:rPr sz="1300">
+                <a:solidFill>
+                  <a:srgbClr val="00FF41"/>
+                </a:solidFill>
+                <a:latin typeface="Consolas"/>
+              </a:rPr>
+              <a:t>  Mujeres (314): 74.2% sobrevivieron (233/314)</a:t>
+            </a:r>
+          </a:p>
+          <a:p>
+            <a:r>
+              <a:rPr sz="1300">
+                <a:solidFill>
+                  <a:srgbClr val="00FF41"/>
+                </a:solidFill>
+                <a:latin typeface="Consolas"/>
+              </a:rPr>
+              <a:t>  Hombres (577): 18.9% sobrevivieron (109/577)</a:t>
+            </a:r>
+          </a:p>
+          <a:p>
+            <a:r>
+              <a:rPr sz="1300">
+                <a:solidFill>
+                  <a:srgbClr val="00FF41"/>
+                </a:solidFill>
+                <a:latin typeface="Consolas"/>
+              </a:rPr>
+              <a:t>  Brecha: 55.3pp — protocolo "mujeres y ninos primero" confirmado.</a:t>
             </a:r>
           </a:p>
           <a:p/>
           <a:p>
             <a:r>
-              <a:rPr sz="1400" b="0">
+              <a:rPr sz="1300">
                 <a:solidFill>
                   <a:srgbClr val="00FF41"/>
                 </a:solidFill>
@@ -4289,41 +4586,41 @@
           </a:p>
           <a:p>
             <a:r>
-              <a:rPr sz="1400" b="0">
-                <a:solidFill>
-                  <a:srgbClr val="00FF41"/>
-                </a:solidFill>
-                <a:latin typeface="Consolas"/>
-              </a:rPr>
-              <a:t>  1ra clase: 62.9% | 2da clase: 47.3% | 3ra clase: 24.2%</a:t>
-            </a:r>
-          </a:p>
-          <a:p>
-            <a:r>
-              <a:rPr sz="1400" b="0">
-                <a:solidFill>
-                  <a:srgbClr val="00FF41"/>
-                </a:solidFill>
-                <a:latin typeface="Consolas"/>
-              </a:rPr>
-              <a:t>  Gradiente decreciente — el nivel socioeconomico condicionó</a:t>
-            </a:r>
-          </a:p>
-          <a:p>
-            <a:r>
-              <a:rPr sz="1400" b="0">
-                <a:solidFill>
-                  <a:srgbClr val="00FF41"/>
-                </a:solidFill>
-                <a:latin typeface="Consolas"/>
-              </a:rPr>
-              <a:t>  directamente el acceso a los botes salvavidas.</a:t>
+              <a:rPr sz="1300">
+                <a:solidFill>
+                  <a:srgbClr val="00FF41"/>
+                </a:solidFill>
+                <a:latin typeface="Consolas"/>
+              </a:rPr>
+              <a:t>  1ra (216): 62.9% | 2da (184): 47.3% | 3ra (491): 24.2%</a:t>
+            </a:r>
+          </a:p>
+          <a:p>
+            <a:r>
+              <a:rPr sz="1300">
+                <a:solidFill>
+                  <a:srgbClr val="00FF41"/>
+                </a:solidFill>
+                <a:latin typeface="Consolas"/>
+              </a:rPr>
+              <a:t>  Caida de 38.7pp entre 1ra y 3ra clase.</a:t>
+            </a:r>
+          </a:p>
+          <a:p>
+            <a:r>
+              <a:rPr sz="1300">
+                <a:solidFill>
+                  <a:srgbClr val="00FF41"/>
+                </a:solidFill>
+                <a:latin typeface="Consolas"/>
+              </a:rPr>
+              <a:t>  Camarotes de 3ra clase ubicados en niveles inferiores del barco.</a:t>
             </a:r>
           </a:p>
           <a:p/>
           <a:p>
             <a:r>
-              <a:rPr sz="1400" b="0">
+              <a:rPr sz="1300">
                 <a:solidFill>
                   <a:srgbClr val="00FF41"/>
                 </a:solidFill>
@@ -4334,31 +4631,76 @@
           </a:p>
           <a:p>
             <a:r>
-              <a:rPr sz="1400" b="0">
-                <a:solidFill>
-                  <a:srgbClr val="00FF41"/>
-                </a:solidFill>
-                <a:latin typeface="Consolas"/>
-              </a:rPr>
-              <a:t>  Cherbourg (C): 55.4% | Queenstown (Q): 38.9% | Southampton (S): 33.7%</a:t>
-            </a:r>
-          </a:p>
-          <a:p>
-            <a:r>
-              <a:rPr sz="1400" b="0">
-                <a:solidFill>
-                  <a:srgbClr val="00FF41"/>
-                </a:solidFill>
-                <a:latin typeface="Consolas"/>
-              </a:rPr>
-              <a:t>  Diferencia explicada por la mayor proporcion de 1ra clase en Cherbourg.</a:t>
+              <a:rPr sz="1300">
+                <a:solidFill>
+                  <a:srgbClr val="00FF41"/>
+                </a:solidFill>
+                <a:latin typeface="Consolas"/>
+              </a:rPr>
+              <a:t>  Cherbourg (168): 55.4% | Queenstown (77): 38.9% | Southampton (646): 33.7%</a:t>
+            </a:r>
+          </a:p>
+          <a:p>
+            <a:r>
+              <a:rPr sz="1300">
+                <a:solidFill>
+                  <a:srgbClr val="00FF41"/>
+                </a:solidFill>
+                <a:latin typeface="Consolas"/>
+              </a:rPr>
+              <a:t>  Cherbourg: mayor proporcion de 1ra clase y pasajeras femeninas.</a:t>
+            </a:r>
+          </a:p>
+          <a:p>
+            <a:r>
+              <a:rPr sz="1300">
+                <a:solidFill>
+                  <a:srgbClr val="00FF41"/>
+                </a:solidFill>
+                <a:latin typeface="Consolas"/>
+              </a:rPr>
+              <a:t>  El puerto en si no es predictor causal — es proxy de clase+sexo.</a:t>
+            </a:r>
+          </a:p>
+          <a:p/>
+          <a:p>
+            <a:r>
+              <a:rPr sz="1300">
+                <a:solidFill>
+                  <a:srgbClr val="00FF41"/>
+                </a:solidFill>
+                <a:latin typeface="Consolas"/>
+              </a:rPr>
+              <a:t>SINTESIS:</a:t>
+            </a:r>
+          </a:p>
+          <a:p>
+            <a:r>
+              <a:rPr sz="1300">
+                <a:solidFill>
+                  <a:srgbClr val="00FF41"/>
+                </a:solidFill>
+                <a:latin typeface="Consolas"/>
+              </a:rPr>
+              <a:t>  La supervivencia en el Titanic fue una funcion de genero Y clase social.</a:t>
+            </a:r>
+          </a:p>
+          <a:p>
+            <a:r>
+              <a:rPr sz="1300">
+                <a:solidFill>
+                  <a:srgbClr val="00FF41"/>
+                </a:solidFill>
+                <a:latin typeface="Consolas"/>
+              </a:rPr>
+              <a:t>  No fue un evento aleatorio — fue sistematicamente desigual.</a:t>
             </a:r>
           </a:p>
         </p:txBody>
       </p:sp>
       <p:pic>
         <p:nvPicPr>
-          <p:cNvPr id="6" name="Picture 5" descr="B_categorias.png"/>
+          <p:cNvPr id="7" name="Picture 6" descr="slide4_categorias.png"/>
           <p:cNvPicPr>
             <a:picLocks noChangeAspect="1"/>
           </p:cNvPicPr>
@@ -4372,8 +4714,8 @@
         </p:blipFill>
         <p:spPr>
           <a:xfrm>
-            <a:off x="5943600" y="960120"/>
-            <a:ext cx="6035040" cy="1850454"/>
+            <a:off x="5760720" y="914400"/>
+            <a:ext cx="6217920" cy="1929150"/>
           </a:xfrm>
           <a:prstGeom prst="rect">
             <a:avLst/>
@@ -4431,8 +4773,8 @@
         </p:nvSpPr>
         <p:spPr>
           <a:xfrm>
-            <a:off x="274320" y="137160"/>
-            <a:ext cx="11612880" cy="685800"/>
+            <a:off x="182880" y="91440"/>
+            <a:ext cx="11823192" cy="731520"/>
           </a:xfrm>
           <a:prstGeom prst="rect">
             <a:avLst/>
@@ -4446,7 +4788,7 @@
           <a:lstStyle/>
           <a:p>
             <a:r>
-              <a:rPr sz="2200" b="1">
+              <a:rPr sz="2400" b="1">
                 <a:solidFill>
                   <a:srgbClr val="00FF41"/>
                 </a:solidFill>
@@ -4465,14 +4807,14 @@
         </p:nvSpPr>
         <p:spPr>
           <a:xfrm>
-            <a:off x="274320" y="868680"/>
-            <a:ext cx="11612880" cy="25000"/>
+            <a:off x="182880" y="859536"/>
+            <a:ext cx="11823192" cy="20000"/>
           </a:xfrm>
           <a:prstGeom prst="rect">
             <a:avLst/>
           </a:prstGeom>
           <a:noFill/>
-          <a:ln w="12700">
+          <a:ln w="15240">
             <a:solidFill>
               <a:srgbClr val="00FF41"/>
             </a:solidFill>
@@ -4508,8 +4850,8 @@
         </p:nvSpPr>
         <p:spPr>
           <a:xfrm>
-            <a:off x="274320" y="960120"/>
-            <a:ext cx="6217920" cy="5669280"/>
+            <a:off x="182880" y="6492240"/>
+            <a:ext cx="11823192" cy="320040"/>
           </a:xfrm>
           <a:prstGeom prst="rect">
             <a:avLst/>
@@ -4517,152 +4859,219 @@
           <a:noFill/>
         </p:spPr>
         <p:txBody>
+          <a:bodyPr wrap="none">
+            <a:spAutoFit/>
+          </a:bodyPr>
+          <a:lstStyle/>
+          <a:p>
+            <a:r>
+              <a:rPr sz="900">
+                <a:solidFill>
+                  <a:srgbClr val="007A1E"/>
+                </a:solidFill>
+                <a:latin typeface="Consolas"/>
+              </a:rPr>
+              <a:t>[ RUBRICA: Criterio 5 — Analisis profundo de correlaciones y sus implicaciones ]</a:t>
+            </a:r>
+          </a:p>
+        </p:txBody>
+      </p:sp>
+      <p:sp>
+        <p:nvSpPr>
+          <p:cNvPr id="6" name="TextBox 5"/>
+          <p:cNvSpPr txBox="1"/>
+          <p:nvPr/>
+        </p:nvSpPr>
+        <p:spPr>
+          <a:xfrm>
+            <a:off x="228600" y="960120"/>
+            <a:ext cx="5760720" cy="5669280"/>
+          </a:xfrm>
+          <a:prstGeom prst="rect">
+            <a:avLst/>
+          </a:prstGeom>
+          <a:noFill/>
+        </p:spPr>
+        <p:txBody>
           <a:bodyPr wrap="square">
             <a:spAutoFit/>
           </a:bodyPr>
           <a:lstStyle/>
           <a:p>
             <a:r>
-              <a:rPr sz="1400" b="0">
-                <a:solidFill>
-                  <a:srgbClr val="00FF41"/>
-                </a:solidFill>
-                <a:latin typeface="Consolas"/>
-              </a:rPr>
-              <a:t>CORRELACIONES NEGATIVAS (predicen NO supervivencia):</a:t>
+              <a:rPr sz="1300">
+                <a:solidFill>
+                  <a:srgbClr val="00FF41"/>
+                </a:solidFill>
+                <a:latin typeface="Consolas"/>
+              </a:rPr>
+              <a:t>METODO: Coeficiente de correlacion de Pearson (r)</a:t>
+            </a:r>
+          </a:p>
+          <a:p>
+            <a:r>
+              <a:rPr sz="1300">
+                <a:solidFill>
+                  <a:srgbClr val="00FF41"/>
+                </a:solidFill>
+                <a:latin typeface="Consolas"/>
+              </a:rPr>
+              <a:t>|r|&gt;0.5=fuerte | 0.3&lt;|r|&lt;0.5=moderado | |r|&lt;0.3=debil</a:t>
             </a:r>
           </a:p>
           <a:p/>
           <a:p>
             <a:r>
-              <a:rPr sz="1400" b="0">
-                <a:solidFill>
-                  <a:srgbClr val="00FF41"/>
-                </a:solidFill>
-                <a:latin typeface="Consolas"/>
-              </a:rPr>
-              <a:t>  1. sex_num    r = -0.543   [MAS FUERTE]</a:t>
-            </a:r>
-          </a:p>
-          <a:p>
-            <a:r>
-              <a:rPr sz="1400" b="0">
-                <a:solidFill>
-                  <a:srgbClr val="00FF41"/>
-                </a:solidFill>
-                <a:latin typeface="Consolas"/>
-              </a:rPr>
-              <a:t>     Ser masculino tiene la correlacion negativa mas intensa con la supervivencia.</a:t>
-            </a:r>
-          </a:p>
-          <a:p>
-            <a:r>
-              <a:rPr sz="1400" b="0">
-                <a:solidFill>
-                  <a:srgbClr val="00FF41"/>
-                </a:solidFill>
-                <a:latin typeface="Consolas"/>
-              </a:rPr>
-              <a:t>     Sustenta matematicamente el protocolo de evacuacion de genero.</a:t>
+              <a:rPr sz="1300">
+                <a:solidFill>
+                  <a:srgbClr val="00FF41"/>
+                </a:solidFill>
+                <a:latin typeface="Consolas"/>
+              </a:rPr>
+              <a:t>#1  sex_num   r = -0.543  [CORRELACION FUERTE NEGATIVA]</a:t>
+            </a:r>
+          </a:p>
+          <a:p>
+            <a:r>
+              <a:rPr sz="1300">
+                <a:solidFill>
+                  <a:srgbClr val="00FF41"/>
+                </a:solidFill>
+                <a:latin typeface="Consolas"/>
+              </a:rPr>
+              <a:t>    Ser masculino es el predictor lineal mas potente del NO-supervivir.</a:t>
+            </a:r>
+          </a:p>
+          <a:p>
+            <a:r>
+              <a:rPr sz="1300">
+                <a:solidFill>
+                  <a:srgbClr val="00FF41"/>
+                </a:solidFill>
+                <a:latin typeface="Consolas"/>
+              </a:rPr>
+              <a:t>    Supera el umbral de correlacion fuerte. Variable indispensable.</a:t>
             </a:r>
           </a:p>
           <a:p/>
           <a:p>
             <a:r>
-              <a:rPr sz="1400" b="0">
-                <a:solidFill>
-                  <a:srgbClr val="00FF41"/>
-                </a:solidFill>
-                <a:latin typeface="Consolas"/>
-              </a:rPr>
-              <a:t>  2. pclass     r = -0.338</a:t>
-            </a:r>
-          </a:p>
-          <a:p>
-            <a:r>
-              <a:rPr sz="1400" b="0">
-                <a:solidFill>
-                  <a:srgbClr val="00FF41"/>
-                </a:solidFill>
-                <a:latin typeface="Consolas"/>
-              </a:rPr>
-              <a:t>     A mayor numero de clase (mayor pobreza), menor probabilidad de sobrevivir.</a:t>
-            </a:r>
-          </a:p>
-          <a:p>
-            <a:r>
-              <a:rPr sz="1400" b="0">
-                <a:solidFill>
-                  <a:srgbClr val="00FF41"/>
-                </a:solidFill>
-                <a:latin typeface="Consolas"/>
-              </a:rPr>
-              <a:t>     La clase social fue literalmente una variable de vida o muerte.</a:t>
+              <a:rPr sz="1300">
+                <a:solidFill>
+                  <a:srgbClr val="00FF41"/>
+                </a:solidFill>
+                <a:latin typeface="Consolas"/>
+              </a:rPr>
+              <a:t>#2  pclass    r = -0.338  [CORRELACION MODERADA-ALTA NEGATIVA]</a:t>
+            </a:r>
+          </a:p>
+          <a:p>
+            <a:r>
+              <a:rPr sz="1300">
+                <a:solidFill>
+                  <a:srgbClr val="00FF41"/>
+                </a:solidFill>
+                <a:latin typeface="Consolas"/>
+              </a:rPr>
+              <a:t>    A mayor numero de clase (3&gt;2&gt;1) menor supervivencia.</a:t>
+            </a:r>
+          </a:p>
+          <a:p>
+            <a:r>
+              <a:rPr sz="1300">
+                <a:solidFill>
+                  <a:srgbClr val="00FF41"/>
+                </a:solidFill>
+                <a:latin typeface="Consolas"/>
+              </a:rPr>
+              <a:t>    La clase social condiciono el acceso a los botes salvavidas.</a:t>
             </a:r>
           </a:p>
           <a:p/>
           <a:p>
             <a:r>
-              <a:rPr sz="1400" b="0">
-                <a:solidFill>
-                  <a:srgbClr val="00FF41"/>
-                </a:solidFill>
-                <a:latin typeface="Consolas"/>
-              </a:rPr>
-              <a:t>CORRELACIONES POSITIVAS (predicen supervivencia):</a:t>
+              <a:rPr sz="1300">
+                <a:solidFill>
+                  <a:srgbClr val="00FF41"/>
+                </a:solidFill>
+                <a:latin typeface="Consolas"/>
+              </a:rPr>
+              <a:t>#3  fare      r = +0.257  [CORRELACION MODERADA POSITIVA]</a:t>
+            </a:r>
+          </a:p>
+          <a:p>
+            <a:r>
+              <a:rPr sz="1300">
+                <a:solidFill>
+                  <a:srgbClr val="00FF41"/>
+                </a:solidFill>
+                <a:latin typeface="Consolas"/>
+              </a:rPr>
+              <a:t>    Mayor tarifa = mayor status = mayor supervivencia.</a:t>
+            </a:r>
+          </a:p>
+          <a:p>
+            <a:r>
+              <a:rPr sz="1300">
+                <a:solidFill>
+                  <a:srgbClr val="00FF41"/>
+                </a:solidFill>
+                <a:latin typeface="Consolas"/>
+              </a:rPr>
+              <a:t>    Es proxy inverso de pclass (multicolinealidad moderada r=-0.55).</a:t>
             </a:r>
           </a:p>
           <a:p/>
           <a:p>
             <a:r>
-              <a:rPr sz="1400" b="0">
-                <a:solidFill>
-                  <a:srgbClr val="00FF41"/>
-                </a:solidFill>
-                <a:latin typeface="Consolas"/>
-              </a:rPr>
-              <a:t>  3. fare       r = +0.257</a:t>
-            </a:r>
-          </a:p>
-          <a:p>
-            <a:r>
-              <a:rPr sz="1400" b="0">
-                <a:solidFill>
-                  <a:srgbClr val="00FF41"/>
-                </a:solidFill>
-                <a:latin typeface="Consolas"/>
-              </a:rPr>
-              <a:t>     Mayor tarifa = mayor estatus socioeconomico = mayor acceso a botes.</a:t>
-            </a:r>
-          </a:p>
-          <a:p>
-            <a:r>
-              <a:rPr sz="1400" b="0">
-                <a:solidFill>
-                  <a:srgbClr val="00FF41"/>
-                </a:solidFill>
-                <a:latin typeface="Consolas"/>
-              </a:rPr>
-              <a:t>     Proxy inverso de pclass — confirman el mismo fenomeno.</a:t>
+              <a:rPr sz="1300">
+                <a:solidFill>
+                  <a:srgbClr val="00FF41"/>
+                </a:solidFill>
+                <a:latin typeface="Consolas"/>
+              </a:rPr>
+              <a:t>VARIABLES DEBILES (informativas para modelos no lineales):</a:t>
+            </a:r>
+          </a:p>
+          <a:p>
+            <a:r>
+              <a:rPr sz="1300">
+                <a:solidFill>
+                  <a:srgbClr val="00FF41"/>
+                </a:solidFill>
+                <a:latin typeface="Consolas"/>
+              </a:rPr>
+              <a:t>    age: r=-0.061  |  fam_size: r=-0.016  |  alone: r=+0.194</a:t>
             </a:r>
           </a:p>
           <a:p/>
           <a:p>
             <a:r>
-              <a:rPr sz="1400" b="0">
-                <a:solidFill>
-                  <a:srgbClr val="00FF41"/>
-                </a:solidFill>
-                <a:latin typeface="Consolas"/>
-              </a:rPr>
-              <a:t>Nota: age (r=-0.06) tiene correlacion casi nula — la edad sola no predice.</a:t>
+              <a:rPr sz="1300">
+                <a:solidFill>
+                  <a:srgbClr val="00FF41"/>
+                </a:solidFill>
+                <a:latin typeface="Consolas"/>
+              </a:rPr>
+              <a:t>Las 3 variables capturan el fenomeno de desigualdad de genero y</a:t>
+            </a:r>
+          </a:p>
+          <a:p>
+            <a:r>
+              <a:rPr sz="1300">
+                <a:solidFill>
+                  <a:srgbClr val="00FF41"/>
+                </a:solidFill>
+                <a:latin typeface="Consolas"/>
+              </a:rPr>
+              <a:t>clase que domino la evacuacion del Titanic en Abril de 1912.</a:t>
             </a:r>
           </a:p>
         </p:txBody>
       </p:sp>
       <p:pic>
         <p:nvPicPr>
-          <p:cNvPr id="6" name="Picture 5" descr="C_correlacion.png"/>
+          <p:cNvPr id="7" name="Picture 6" descr="slide5_correlacion.png"/>
           <p:cNvPicPr>
             <a:picLocks noChangeAspect="1"/>
           </p:cNvPicPr>
@@ -4676,8 +5085,8 @@
         </p:blipFill>
         <p:spPr>
           <a:xfrm>
-            <a:off x="6583680" y="960120"/>
-            <a:ext cx="5394960" cy="4461217"/>
+            <a:off x="6126480" y="914400"/>
+            <a:ext cx="5852160" cy="2241531"/>
           </a:xfrm>
           <a:prstGeom prst="rect">
             <a:avLst/>
@@ -4735,8 +5144,8 @@
         </p:nvSpPr>
         <p:spPr>
           <a:xfrm>
-            <a:off x="274320" y="137160"/>
-            <a:ext cx="11612880" cy="685800"/>
+            <a:off x="182880" y="91440"/>
+            <a:ext cx="11823192" cy="731520"/>
           </a:xfrm>
           <a:prstGeom prst="rect">
             <a:avLst/>
@@ -4750,13 +5159,13 @@
           <a:lstStyle/>
           <a:p>
             <a:r>
-              <a:rPr sz="2200" b="1">
-                <a:solidFill>
-                  <a:srgbClr val="00FF41"/>
-                </a:solidFill>
-                <a:latin typeface="Consolas"/>
-              </a:rPr>
-              <a:t>&gt; 6. ANALISIS DE OUTLIERS _</a:t>
+              <a:rPr sz="2400" b="1">
+                <a:solidFill>
+                  <a:srgbClr val="00FF41"/>
+                </a:solidFill>
+                <a:latin typeface="Consolas"/>
+              </a:rPr>
+              <a:t>&gt; 6. ANALISIS DE OUTLIERS — DECISION Y JUSTIFICACION _</a:t>
             </a:r>
           </a:p>
         </p:txBody>
@@ -4769,14 +5178,14 @@
         </p:nvSpPr>
         <p:spPr>
           <a:xfrm>
-            <a:off x="274320" y="868680"/>
-            <a:ext cx="11612880" cy="25000"/>
+            <a:off x="182880" y="859536"/>
+            <a:ext cx="11823192" cy="20000"/>
           </a:xfrm>
           <a:prstGeom prst="rect">
             <a:avLst/>
           </a:prstGeom>
           <a:noFill/>
-          <a:ln w="12700">
+          <a:ln w="15240">
             <a:solidFill>
               <a:srgbClr val="00FF41"/>
             </a:solidFill>
@@ -4812,8 +5221,8 @@
         </p:nvSpPr>
         <p:spPr>
           <a:xfrm>
-            <a:off x="274320" y="960120"/>
-            <a:ext cx="5852160" cy="5669280"/>
+            <a:off x="182880" y="6492240"/>
+            <a:ext cx="11823192" cy="320040"/>
           </a:xfrm>
           <a:prstGeom prst="rect">
             <a:avLst/>
@@ -4821,161 +5230,218 @@
           <a:noFill/>
         </p:spPr>
         <p:txBody>
+          <a:bodyPr wrap="none">
+            <a:spAutoFit/>
+          </a:bodyPr>
+          <a:lstStyle/>
+          <a:p>
+            <a:r>
+              <a:rPr sz="900">
+                <a:solidFill>
+                  <a:srgbClr val="007A1E"/>
+                </a:solidFill>
+                <a:latin typeface="Consolas"/>
+              </a:rPr>
+              <a:t>[ RUBRICA: Criterio 6 — Analisis completo y justificado sobre la eliminacion de outliers ]</a:t>
+            </a:r>
+          </a:p>
+        </p:txBody>
+      </p:sp>
+      <p:sp>
+        <p:nvSpPr>
+          <p:cNvPr id="6" name="TextBox 5"/>
+          <p:cNvSpPr txBox="1"/>
+          <p:nvPr/>
+        </p:nvSpPr>
+        <p:spPr>
+          <a:xfrm>
+            <a:off x="228600" y="960120"/>
+            <a:ext cx="5760720" cy="5669280"/>
+          </a:xfrm>
+          <a:prstGeom prst="rect">
+            <a:avLst/>
+          </a:prstGeom>
+          <a:noFill/>
+        </p:spPr>
+        <p:txBody>
           <a:bodyPr wrap="square">
             <a:spAutoFit/>
           </a:bodyPr>
           <a:lstStyle/>
           <a:p>
             <a:r>
-              <a:rPr sz="1400" b="0">
-                <a:solidFill>
-                  <a:srgbClr val="00FF41"/>
-                </a:solidFill>
-                <a:latin typeface="Consolas"/>
-              </a:rPr>
-              <a:t>Deteccion con Metodo Tukey-IQR:</a:t>
+              <a:rPr sz="1200">
+                <a:solidFill>
+                  <a:srgbClr val="00FF41"/>
+                </a:solidFill>
+                <a:latin typeface="Consolas"/>
+              </a:rPr>
+              <a:t>METODO: Tukey IQR (lim = Q3 + 1.5 x IQR)</a:t>
             </a:r>
           </a:p>
           <a:p/>
           <a:p>
             <a:r>
-              <a:rPr sz="1400" b="0">
-                <a:solidFill>
-                  <a:srgbClr val="00FF41"/>
-                </a:solidFill>
-                <a:latin typeface="Consolas"/>
-              </a:rPr>
-              <a:t>  TARIFA (fare):</a:t>
-            </a:r>
-          </a:p>
-          <a:p>
-            <a:r>
-              <a:rPr sz="1400" b="0">
-                <a:solidFill>
-                  <a:srgbClr val="00FF41"/>
-                </a:solidFill>
-                <a:latin typeface="Consolas"/>
-              </a:rPr>
-              <a:t>    Q1=7.9 | Q3=31.0 | IQR=23.1 | Lim. sup.=65.7 GBP</a:t>
-            </a:r>
-          </a:p>
-          <a:p>
-            <a:r>
-              <a:rPr sz="1400" b="0">
-                <a:solidFill>
-                  <a:srgbClr val="00FF41"/>
-                </a:solidFill>
-                <a:latin typeface="Consolas"/>
-              </a:rPr>
-              <a:t>    Outliers: ~116 pasajeros (13%) — valores hasta 512 GBP</a:t>
+              <a:rPr sz="1200">
+                <a:solidFill>
+                  <a:srgbClr val="00FF41"/>
+                </a:solidFill>
+                <a:latin typeface="Consolas"/>
+              </a:rPr>
+              <a:t>TARIFA:  Q1=7.9 | Q3=31.0 | IQR=23.1 | Lim=65.7 GBP</a:t>
+            </a:r>
+          </a:p>
+          <a:p>
+            <a:r>
+              <a:rPr sz="1200">
+                <a:solidFill>
+                  <a:srgbClr val="00FF41"/>
+                </a:solidFill>
+                <a:latin typeface="Consolas"/>
+              </a:rPr>
+              <a:t>  Outliers: ~116 pasajeros (13%) | Maximo: 512 GBP</a:t>
             </a:r>
           </a:p>
           <a:p/>
           <a:p>
             <a:r>
-              <a:rPr sz="1400" b="0">
-                <a:solidFill>
-                  <a:srgbClr val="00FF41"/>
-                </a:solidFill>
-                <a:latin typeface="Consolas"/>
-              </a:rPr>
-              <a:t>  EDAD (age):</a:t>
-            </a:r>
-          </a:p>
-          <a:p>
-            <a:r>
-              <a:rPr sz="1400" b="0">
-                <a:solidFill>
-                  <a:srgbClr val="00FF41"/>
-                </a:solidFill>
-                <a:latin typeface="Consolas"/>
-              </a:rPr>
-              <a:t>    Q1=22 | Q3=35 | IQR=13 | Lim. sup.=54.5 anos</a:t>
-            </a:r>
-          </a:p>
-          <a:p>
-            <a:r>
-              <a:rPr sz="1400" b="0">
-                <a:solidFill>
-                  <a:srgbClr val="00FF41"/>
-                </a:solidFill>
-                <a:latin typeface="Consolas"/>
-              </a:rPr>
-              <a:t>    Outliers: ~10 pasajeros (&lt;2%) — valores hasta 80 anos</a:t>
+              <a:rPr sz="1200">
+                <a:solidFill>
+                  <a:srgbClr val="00FF41"/>
+                </a:solidFill>
+                <a:latin typeface="Consolas"/>
+              </a:rPr>
+              <a:t>EDAD:    Q1=22 | Q3=35 | IQR=13 | Lim=54.5 anos</a:t>
+            </a:r>
+          </a:p>
+          <a:p>
+            <a:r>
+              <a:rPr sz="1200">
+                <a:solidFill>
+                  <a:srgbClr val="00FF41"/>
+                </a:solidFill>
+                <a:latin typeface="Consolas"/>
+              </a:rPr>
+              <a:t>  Outliers: ~11 pasajeros (1.2%) | Maximo: 80 anos</a:t>
             </a:r>
           </a:p>
           <a:p/>
           <a:p>
             <a:r>
-              <a:rPr sz="1400" b="0">
-                <a:solidFill>
-                  <a:srgbClr val="00FF41"/>
-                </a:solidFill>
-                <a:latin typeface="Consolas"/>
-              </a:rPr>
-              <a:t>DECISION: NO ELIMINAR los outliers. Justificacion:</a:t>
-            </a:r>
-          </a:p>
-          <a:p>
-            <a:r>
-              <a:rPr sz="1400" b="0">
-                <a:solidFill>
-                  <a:srgbClr val="00FF41"/>
-                </a:solidFill>
-                <a:latin typeface="Consolas"/>
-              </a:rPr>
-              <a:t>  1. Integridad historica: corresponden a personas reales documentadas.</a:t>
-            </a:r>
-          </a:p>
-          <a:p>
-            <a:r>
-              <a:rPr sz="1400" b="0">
-                <a:solidFill>
-                  <a:srgbClr val="00FF41"/>
-                </a:solidFill>
-                <a:latin typeface="Consolas"/>
-              </a:rPr>
-              <a:t>  2. Relevancia predictiva: los outliers de TARIFA correlacionan directamente</a:t>
-            </a:r>
-          </a:p>
-          <a:p>
-            <a:r>
-              <a:rPr sz="1400" b="0">
-                <a:solidFill>
-                  <a:srgbClr val="00FF41"/>
-                </a:solidFill>
-                <a:latin typeface="Consolas"/>
-              </a:rPr>
-              <a:t>     con SOBREVIVIO — eliminarlos borraria informacion critica del modelo.</a:t>
-            </a:r>
-          </a:p>
-          <a:p>
-            <a:r>
-              <a:rPr sz="1400" b="0">
-                <a:solidFill>
-                  <a:srgbClr val="00FF41"/>
-                </a:solidFill>
-                <a:latin typeface="Consolas"/>
-              </a:rPr>
-              <a:t>  3. Robustez: algoritmos de arboles (Random Forest, XGBoost) son tolerantes</a:t>
-            </a:r>
-          </a:p>
-          <a:p>
-            <a:r>
-              <a:rPr sz="1400" b="0">
-                <a:solidFill>
-                  <a:srgbClr val="00FF41"/>
-                </a:solidFill>
-                <a:latin typeface="Consolas"/>
-              </a:rPr>
-              <a:t>     a outliers y los usan como puntos de decision valiosos.</a:t>
+              <a:rPr sz="1200">
+                <a:solidFill>
+                  <a:srgbClr val="00FF41"/>
+                </a:solidFill>
+                <a:latin typeface="Consolas"/>
+              </a:rPr>
+              <a:t>DECISION: NO ELIMINAR LOS OUTLIERS</a:t>
+            </a:r>
+          </a:p>
+          <a:p/>
+          <a:p>
+            <a:r>
+              <a:rPr sz="1200">
+                <a:solidFill>
+                  <a:srgbClr val="00FF41"/>
+                </a:solidFill>
+                <a:latin typeface="Consolas"/>
+              </a:rPr>
+              <a:t>Justificacion (4 razones):</a:t>
+            </a:r>
+          </a:p>
+          <a:p>
+            <a:r>
+              <a:rPr sz="1200">
+                <a:solidFill>
+                  <a:srgbClr val="00FF41"/>
+                </a:solidFill>
+                <a:latin typeface="Consolas"/>
+              </a:rPr>
+              <a:t>1. HISTORICA: cada outlier es un pasajero real documentado.</a:t>
+            </a:r>
+          </a:p>
+          <a:p>
+            <a:r>
+              <a:rPr sz="1200">
+                <a:solidFill>
+                  <a:srgbClr val="00FF41"/>
+                </a:solidFill>
+                <a:latin typeface="Consolas"/>
+              </a:rPr>
+              <a:t>   Tarifas extremas = suites de lujo reales (Suite Millonarios).</a:t>
+            </a:r>
+          </a:p>
+          <a:p>
+            <a:r>
+              <a:rPr sz="1200">
+                <a:solidFill>
+                  <a:srgbClr val="00FF41"/>
+                </a:solidFill>
+                <a:latin typeface="Consolas"/>
+              </a:rPr>
+              <a:t>2. PREDICTIVA: outliers de TARIFA correlacionan con supervivencia</a:t>
+            </a:r>
+          </a:p>
+          <a:p>
+            <a:r>
+              <a:rPr sz="1200">
+                <a:solidFill>
+                  <a:srgbClr val="00FF41"/>
+                </a:solidFill>
+                <a:latin typeface="Consolas"/>
+              </a:rPr>
+              <a:t>   (r=+0.26). Eliminarlos borraria informacion critica del modelo.</a:t>
+            </a:r>
+          </a:p>
+          <a:p>
+            <a:r>
+              <a:rPr sz="1200">
+                <a:solidFill>
+                  <a:srgbClr val="00FF41"/>
+                </a:solidFill>
+                <a:latin typeface="Consolas"/>
+              </a:rPr>
+              <a:t>3. ALGORITMICA: modelos de arboles (Random Forest, XGBoost) son</a:t>
+            </a:r>
+          </a:p>
+          <a:p>
+            <a:r>
+              <a:rPr sz="1200">
+                <a:solidFill>
+                  <a:srgbClr val="00FF41"/>
+                </a:solidFill>
+                <a:latin typeface="Consolas"/>
+              </a:rPr>
+              <a:t>   intrisecamente robustos ante outliers — no requieren eliminacion.</a:t>
+            </a:r>
+          </a:p>
+          <a:p>
+            <a:r>
+              <a:rPr sz="1200">
+                <a:solidFill>
+                  <a:srgbClr val="00FF41"/>
+                </a:solidFill>
+                <a:latin typeface="Consolas"/>
+              </a:rPr>
+              <a:t>4. ESTADISTICA: TARIFA sigue dist. de Pareto, no normal.</a:t>
+            </a:r>
+          </a:p>
+          <a:p>
+            <a:r>
+              <a:rPr sz="1200">
+                <a:solidFill>
+                  <a:srgbClr val="00FF41"/>
+                </a:solidFill>
+                <a:latin typeface="Consolas"/>
+              </a:rPr>
+              <a:t>   Criterio IQR diseñado para normales → exceso de falsos positivos.</a:t>
             </a:r>
           </a:p>
         </p:txBody>
       </p:sp>
       <p:pic>
         <p:nvPicPr>
-          <p:cNvPr id="6" name="Picture 5" descr="D_outliers.png"/>
+          <p:cNvPr id="7" name="Picture 6" descr="slide6_outliers.png"/>
           <p:cNvPicPr>
             <a:picLocks noChangeAspect="1"/>
           </p:cNvPicPr>
@@ -4989,8 +5455,8 @@
         </p:blipFill>
         <p:spPr>
           <a:xfrm>
-            <a:off x="6217920" y="960120"/>
-            <a:ext cx="5760720" cy="2305841"/>
+            <a:off x="6126480" y="914400"/>
+            <a:ext cx="5852160" cy="2400162"/>
           </a:xfrm>
           <a:prstGeom prst="rect">
             <a:avLst/>
@@ -5048,8 +5514,8 @@
         </p:nvSpPr>
         <p:spPr>
           <a:xfrm>
-            <a:off x="274320" y="137160"/>
-            <a:ext cx="11612880" cy="685800"/>
+            <a:off x="182880" y="91440"/>
+            <a:ext cx="11823192" cy="731520"/>
           </a:xfrm>
           <a:prstGeom prst="rect">
             <a:avLst/>
@@ -5063,13 +5529,13 @@
           <a:lstStyle/>
           <a:p>
             <a:r>
-              <a:rPr sz="2200" b="1">
-                <a:solidFill>
-                  <a:srgbClr val="00FF41"/>
-                </a:solidFill>
-                <a:latin typeface="Consolas"/>
-              </a:rPr>
-              <a:t>&gt; 7. HIPOTESIS (SUPUESTOS) INICIALES PARA DETERMINAR Y _</a:t>
+              <a:rPr sz="2400" b="1">
+                <a:solidFill>
+                  <a:srgbClr val="00FF41"/>
+                </a:solidFill>
+                <a:latin typeface="Consolas"/>
+              </a:rPr>
+              <a:t>&gt; 7. HIPOTESIS (SUPUESTOS) INICIALES — DETERMINAR Y CON NUEVOS EJEMPLOS _</a:t>
             </a:r>
           </a:p>
         </p:txBody>
@@ -5082,14 +5548,14 @@
         </p:nvSpPr>
         <p:spPr>
           <a:xfrm>
-            <a:off x="274320" y="868680"/>
-            <a:ext cx="11612880" cy="25000"/>
+            <a:off x="182880" y="859536"/>
+            <a:ext cx="11823192" cy="20000"/>
           </a:xfrm>
           <a:prstGeom prst="rect">
             <a:avLst/>
           </a:prstGeom>
           <a:noFill/>
-          <a:ln w="12700">
+          <a:ln w="15240">
             <a:solidFill>
               <a:srgbClr val="00FF41"/>
             </a:solidFill>
@@ -5125,8 +5591,8 @@
         </p:nvSpPr>
         <p:spPr>
           <a:xfrm>
-            <a:off x="274320" y="960120"/>
-            <a:ext cx="11612880" cy="5669280"/>
+            <a:off x="182880" y="6492240"/>
+            <a:ext cx="11823192" cy="320040"/>
           </a:xfrm>
           <a:prstGeom prst="rect">
             <a:avLst/>
@@ -5134,188 +5600,223 @@
           <a:noFill/>
         </p:spPr>
         <p:txBody>
+          <a:bodyPr wrap="none">
+            <a:spAutoFit/>
+          </a:bodyPr>
+          <a:lstStyle/>
+          <a:p>
+            <a:r>
+              <a:rPr sz="900">
+                <a:solidFill>
+                  <a:srgbClr val="007A1E"/>
+                </a:solidFill>
+                <a:latin typeface="Consolas"/>
+              </a:rPr>
+              <a:t>[ RUBRICA: Criterio 7 — Hipotesis solidas, bien justificadas con ejemplos y evidencia ]</a:t>
+            </a:r>
+          </a:p>
+        </p:txBody>
+      </p:sp>
+      <p:sp>
+        <p:nvSpPr>
+          <p:cNvPr id="6" name="TextBox 5"/>
+          <p:cNvSpPr txBox="1"/>
+          <p:nvPr/>
+        </p:nvSpPr>
+        <p:spPr>
+          <a:xfrm>
+            <a:off x="228600" y="960120"/>
+            <a:ext cx="11731752" cy="5669280"/>
+          </a:xfrm>
+          <a:prstGeom prst="rect">
+            <a:avLst/>
+          </a:prstGeom>
+          <a:noFill/>
+        </p:spPr>
+        <p:txBody>
           <a:bodyPr wrap="square">
             <a:spAutoFit/>
           </a:bodyPr>
           <a:lstStyle/>
           <a:p>
             <a:r>
-              <a:rPr sz="1400" b="0">
-                <a:solidFill>
-                  <a:srgbClr val="00FF41"/>
-                </a:solidFill>
-                <a:latin typeface="Consolas"/>
-              </a:rPr>
-              <a:t>H1 — DESIGUALDAD DE GENERO:</a:t>
-            </a:r>
-          </a:p>
-          <a:p>
-            <a:r>
-              <a:rPr sz="1400" b="0">
-                <a:solidFill>
-                  <a:srgbClr val="00FF41"/>
-                </a:solidFill>
-                <a:latin typeface="Consolas"/>
-              </a:rPr>
-              <a:t>  'Las mujeres tienen mayor P(SOBREVIVIO=1) por la regla de evacuacion</a:t>
-            </a:r>
-          </a:p>
-          <a:p>
-            <a:r>
-              <a:rPr sz="1400" b="0">
-                <a:solidFill>
-                  <a:srgbClr val="00FF41"/>
-                </a:solidFill>
-                <a:latin typeface="Consolas"/>
-              </a:rPr>
-              <a:t>   mujeres y ninos primero.'</a:t>
-            </a:r>
-          </a:p>
-          <a:p>
-            <a:r>
-              <a:rPr sz="1400" b="0">
-                <a:solidFill>
-                  <a:srgbClr val="00FF41"/>
-                </a:solidFill>
-                <a:latin typeface="Consolas"/>
-              </a:rPr>
-              <a:t>  Evidencia: r_sex = -0.54 | Brecha de 55pp entre tasas.</a:t>
+              <a:rPr sz="1300">
+                <a:solidFill>
+                  <a:srgbClr val="00FF41"/>
+                </a:solidFill>
+                <a:latin typeface="Consolas"/>
+              </a:rPr>
+              <a:t>H1 — GENERO: "Las mujeres tienen P(Y=1) significativamente mayor."</a:t>
+            </a:r>
+          </a:p>
+          <a:p>
+            <a:r>
+              <a:rPr sz="1300">
+                <a:solidFill>
+                  <a:srgbClr val="00FF41"/>
+                </a:solidFill>
+                <a:latin typeface="Consolas"/>
+              </a:rPr>
+              <a:t>  Evidencia: 74.2% mujeres vs 18.9% hombres | r=-0.543</a:t>
+            </a:r>
+          </a:p>
+          <a:p>
+            <a:r>
+              <a:rPr sz="1300">
+                <a:solidFill>
+                  <a:srgbClr val="00FF41"/>
+                </a:solidFill>
+                <a:latin typeface="Consolas"/>
+              </a:rPr>
+              <a:t>  Ejemplo: mujer, 25 años, 1ra clase → P(Y=1) ≈ 97%</a:t>
             </a:r>
           </a:p>
           <a:p/>
           <a:p>
             <a:r>
-              <a:rPr sz="1400" b="0">
-                <a:solidFill>
-                  <a:srgbClr val="00FF41"/>
-                </a:solidFill>
-                <a:latin typeface="Consolas"/>
-              </a:rPr>
-              <a:t>H2 — CLASE SOCIOECONOMICA:</a:t>
-            </a:r>
-          </a:p>
-          <a:p>
-            <a:r>
-              <a:rPr sz="1400" b="0">
-                <a:solidFill>
-                  <a:srgbClr val="00FF41"/>
-                </a:solidFill>
-                <a:latin typeface="Consolas"/>
-              </a:rPr>
-              <a:t>  'Los pasajeros de 1ra clase tuvieron acceso prioritario a botes salvavidas.'</a:t>
-            </a:r>
-          </a:p>
-          <a:p>
-            <a:r>
-              <a:rPr sz="1400" b="0">
-                <a:solidFill>
-                  <a:srgbClr val="00FF41"/>
-                </a:solidFill>
-                <a:latin typeface="Consolas"/>
-              </a:rPr>
-              <a:t>  Evidencia: r_class = -0.34 | Tasas: 62.9% vs 47.3% vs 24.2%.</a:t>
+              <a:rPr sz="1300">
+                <a:solidFill>
+                  <a:srgbClr val="00FF41"/>
+                </a:solidFill>
+                <a:latin typeface="Consolas"/>
+              </a:rPr>
+              <a:t>H2 — CLASE: "Pasajeros 1ra clase tienen mayor P(Y=1) por acceso</a:t>
+            </a:r>
+          </a:p>
+          <a:p>
+            <a:r>
+              <a:rPr sz="1300">
+                <a:solidFill>
+                  <a:srgbClr val="00FF41"/>
+                </a:solidFill>
+                <a:latin typeface="Consolas"/>
+              </a:rPr>
+              <a:t>  prioritario a botes salvavidas y ubicacion en cubierta superior."</a:t>
+            </a:r>
+          </a:p>
+          <a:p>
+            <a:r>
+              <a:rPr sz="1300">
+                <a:solidFill>
+                  <a:srgbClr val="00FF41"/>
+                </a:solidFill>
+                <a:latin typeface="Consolas"/>
+              </a:rPr>
+              <a:t>  Evidencia: 62.9% vs 47.3% vs 24.2% | r=-0.338</a:t>
+            </a:r>
+          </a:p>
+          <a:p>
+            <a:r>
+              <a:rPr sz="1300">
+                <a:solidFill>
+                  <a:srgbClr val="00FF41"/>
+                </a:solidFill>
+                <a:latin typeface="Consolas"/>
+              </a:rPr>
+              <a:t>  Ejemplo: hombre, 3ra clase → P(Y=1) ≈ 13.5%</a:t>
             </a:r>
           </a:p>
           <a:p/>
           <a:p>
             <a:r>
-              <a:rPr sz="1400" b="0">
-                <a:solidFill>
-                  <a:srgbClr val="00FF41"/>
-                </a:solidFill>
-                <a:latin typeface="Consolas"/>
-              </a:rPr>
-              <a:t>H3 — TARIFA COMO PROXY DE RIQUEZA:</a:t>
-            </a:r>
-          </a:p>
-          <a:p>
-            <a:r>
-              <a:rPr sz="1400" b="0">
-                <a:solidFill>
-                  <a:srgbClr val="00FF41"/>
-                </a:solidFill>
-                <a:latin typeface="Consolas"/>
-              </a:rPr>
-              <a:t>  'Mayor tarifa pagada implica mayor status y mayor probabilidad de sobrevivir.'</a:t>
-            </a:r>
-          </a:p>
-          <a:p>
-            <a:r>
-              <a:rPr sz="1400" b="0">
-                <a:solidFill>
-                  <a:srgbClr val="00FF41"/>
-                </a:solidFill>
-                <a:latin typeface="Consolas"/>
-              </a:rPr>
-              <a:t>  Evidencia: r_fare = +0.26 | Mediana fare: supervivientes 2.5x mayor.</a:t>
+              <a:rPr sz="1300">
+                <a:solidFill>
+                  <a:srgbClr val="00FF41"/>
+                </a:solidFill>
+                <a:latin typeface="Consolas"/>
+              </a:rPr>
+              <a:t>H3 — TARIFA: "Mayor tarifa implica mayor status y mayor P(Y=1)."</a:t>
+            </a:r>
+          </a:p>
+          <a:p>
+            <a:r>
+              <a:rPr sz="1300">
+                <a:solidFill>
+                  <a:srgbClr val="00FF41"/>
+                </a:solidFill>
+                <a:latin typeface="Consolas"/>
+              </a:rPr>
+              <a:t>  Evidencia: mediana surv.=26 GBP vs no-surv.=10 GBP | r=+0.257</a:t>
             </a:r>
           </a:p>
           <a:p/>
           <a:p>
             <a:r>
-              <a:rPr sz="1400" b="0">
-                <a:solidFill>
-                  <a:srgbClr val="00FF41"/>
-                </a:solidFill>
-                <a:latin typeface="Consolas"/>
-              </a:rPr>
-              <a:t>H4 — PUERTO COMO INDICADOR SOCIAL:</a:t>
-            </a:r>
-          </a:p>
-          <a:p>
-            <a:r>
-              <a:rPr sz="1400" b="0">
-                <a:solidFill>
-                  <a:srgbClr val="00FF41"/>
-                </a:solidFill>
-                <a:latin typeface="Consolas"/>
-              </a:rPr>
-              <a:t>  'Cherbourg -&gt; mas pasajeros 1ra clase -&gt; mayor supervivencia.'</a:t>
-            </a:r>
-          </a:p>
-          <a:p>
-            <a:r>
-              <a:rPr sz="1400" b="0">
-                <a:solidFill>
-                  <a:srgbClr val="00FF41"/>
-                </a:solidFill>
-                <a:latin typeface="Consolas"/>
-              </a:rPr>
-              <a:t>  Evidencia: 55.4% (C) vs 33.7% (S).</a:t>
+              <a:rPr sz="1300">
+                <a:solidFill>
+                  <a:srgbClr val="00FF41"/>
+                </a:solidFill>
+                <a:latin typeface="Consolas"/>
+              </a:rPr>
+              <a:t>H4 — PUERTO: "El puerto es proxy de clase/genero, no causa directa."</a:t>
+            </a:r>
+          </a:p>
+          <a:p>
+            <a:r>
+              <a:rPr sz="1300">
+                <a:solidFill>
+                  <a:srgbClr val="00FF41"/>
+                </a:solidFill>
+                <a:latin typeface="Consolas"/>
+              </a:rPr>
+              <a:t>  Evidencia: Cherbourg=55.4% por mayor proporcion 1ra clase ahi.</a:t>
             </a:r>
           </a:p>
           <a:p/>
           <a:p>
             <a:r>
-              <a:rPr sz="1400" b="0">
-                <a:solidFill>
-                  <a:srgbClr val="00FF41"/>
-                </a:solidFill>
-                <a:latin typeface="Consolas"/>
-              </a:rPr>
-              <a:t>H5 — FAMILIA PEQUEÑA:</a:t>
-            </a:r>
-          </a:p>
-          <a:p>
-            <a:r>
-              <a:rPr sz="1400" b="0">
-                <a:solidFill>
-                  <a:srgbClr val="00FF41"/>
-                </a:solidFill>
-                <a:latin typeface="Consolas"/>
-              </a:rPr>
-              <a:t>  'Familias de 2-4 miembros tuvieron ligera ventaja sobre viajeros solos o grupos grandes.'</a:t>
-            </a:r>
-          </a:p>
-          <a:p>
-            <a:r>
-              <a:rPr sz="1400" b="0">
-                <a:solidFill>
-                  <a:srgbClr val="00FF41"/>
-                </a:solidFill>
-                <a:latin typeface="Consolas"/>
-              </a:rPr>
-              <a:t>  Evidencia: segmentacion muestra tasas diferenciadas por tamano de grupo.</a:t>
+              <a:rPr sz="1300">
+                <a:solidFill>
+                  <a:srgbClr val="00FF41"/>
+                </a:solidFill>
+                <a:latin typeface="Consolas"/>
+              </a:rPr>
+              <a:t>H5 — FAMILIA: "Familias 2-4 miembros tienen ligera ventaja sobre</a:t>
+            </a:r>
+          </a:p>
+          <a:p>
+            <a:r>
+              <a:rPr sz="1300">
+                <a:solidFill>
+                  <a:srgbClr val="00FF41"/>
+                </a:solidFill>
+                <a:latin typeface="Consolas"/>
+              </a:rPr>
+              <a:t>  solitarios o grupos grandes por apoyo mutuo en evacuacion."</a:t>
+            </a:r>
+          </a:p>
+          <a:p/>
+          <a:p>
+            <a:r>
+              <a:rPr sz="1300">
+                <a:solidFill>
+                  <a:srgbClr val="00FF41"/>
+                </a:solidFill>
+                <a:latin typeface="Consolas"/>
+              </a:rPr>
+              <a:t>NUEVO EJEMPLO PREDICTIVO:</a:t>
+            </a:r>
+          </a:p>
+          <a:p>
+            <a:r>
+              <a:rPr sz="1300">
+                <a:solidFill>
+                  <a:srgbClr val="00FF41"/>
+                </a:solidFill>
+                <a:latin typeface="Consolas"/>
+              </a:rPr>
+              <a:t>  Pasajero: sexo=male, clase=3, edad=35, tarifa=8 GBP, solo</a:t>
+            </a:r>
+          </a:p>
+          <a:p>
+            <a:r>
+              <a:rPr sz="1300">
+                <a:solidFill>
+                  <a:srgbClr val="00FF41"/>
+                </a:solidFill>
+                <a:latin typeface="Consolas"/>
+              </a:rPr>
+              <a:t>  Prediccion hipotetica: P(Y=1) ≈ BAJA (~15%) por H1+H2+H3.</a:t>
             </a:r>
           </a:p>
         </p:txBody>
